--- a/Docs/PA2.pptx
+++ b/Docs/PA2.pptx
@@ -5,7 +5,7 @@
     <p:sldMasterId id="2147483648" r:id="rId1"/>
   </p:sldMasterIdLst>
   <p:notesMasterIdLst>
-    <p:notesMasterId r:id="rId25"/>
+    <p:notesMasterId r:id="rId32"/>
   </p:notesMasterIdLst>
   <p:sldIdLst>
     <p:sldId id="256" r:id="rId2"/>
@@ -30,7 +30,14 @@
     <p:sldId id="281" r:id="rId21"/>
     <p:sldId id="282" r:id="rId22"/>
     <p:sldId id="283" r:id="rId23"/>
-    <p:sldId id="268" r:id="rId24"/>
+    <p:sldId id="273" r:id="rId24"/>
+    <p:sldId id="284" r:id="rId25"/>
+    <p:sldId id="285" r:id="rId26"/>
+    <p:sldId id="286" r:id="rId27"/>
+    <p:sldId id="287" r:id="rId28"/>
+    <p:sldId id="288" r:id="rId29"/>
+    <p:sldId id="289" r:id="rId30"/>
+    <p:sldId id="268" r:id="rId31"/>
   </p:sldIdLst>
   <p:sldSz cx="12192000" cy="6858000"/>
   <p:notesSz cx="9309100" cy="7053263"/>
@@ -264,8 +271,11 @@
     </a:lvl9pPr>
   </p:defaultTextStyle>
   <p:extLst>
+    <p:ext uri="{EFAFB233-063F-42B5-8137-9DF3F51BA10A}">
+      <p15:sldGuideLst xmlns:p15="http://schemas.microsoft.com/office/powerpoint/2012/main"/>
+    </p:ext>
     <p:ext uri="GoogleSlidesCustomDataVersion2">
-      <go:slidesCustomData xmlns:go="http://customooxmlschemas.google.com/" xmlns:ahyp="http://schemas.microsoft.com/office/drawing/2018/hyperlinkcolor" xmlns:p15="http://schemas.microsoft.com/office/powerpoint/2012/main" xmlns:p14="http://schemas.microsoft.com/office/powerpoint/2010/main" xmlns:com="http://schemas.openxmlformats.org/drawingml/2006/compatibility" xmlns:pvml="urn:schemas-microsoft-com:office:powerpoint" xmlns:v="urn:schemas-microsoft-com:vml" xmlns:o="urn:schemas-microsoft-com:office:office" xmlns:dgm="http://schemas.openxmlformats.org/drawingml/2006/diagram" xmlns:c="http://schemas.openxmlformats.org/drawingml/2006/chart" xmlns:mv="urn:schemas-microsoft-com:mac:vml" xmlns:mc="http://schemas.openxmlformats.org/markup-compatibility/2006" xmlns="" r:id="rId26" roundtripDataSignature="AMtx7mi83n313+4sKTzKdoD5rtEtzXbB2Q=="/>
+      <go:slidesCustomData xmlns="" xmlns:mc="http://schemas.openxmlformats.org/markup-compatibility/2006" xmlns:mv="urn:schemas-microsoft-com:mac:vml" xmlns:c="http://schemas.openxmlformats.org/drawingml/2006/chart" xmlns:dgm="http://schemas.openxmlformats.org/drawingml/2006/diagram" xmlns:o="urn:schemas-microsoft-com:office:office" xmlns:v="urn:schemas-microsoft-com:vml" xmlns:pvml="urn:schemas-microsoft-com:office:powerpoint" xmlns:com="http://schemas.openxmlformats.org/drawingml/2006/compatibility" xmlns:p14="http://schemas.microsoft.com/office/powerpoint/2010/main" xmlns:p15="http://schemas.microsoft.com/office/powerpoint/2012/main" xmlns:ahyp="http://schemas.microsoft.com/office/drawing/2018/hyperlinkcolor" xmlns:go="http://customooxmlschemas.google.com/" r:id="rId33" roundtripDataSignature="AMtx7mi83n313+4sKTzKdoD5rtEtzXbB2Q=="/>
     </p:ext>
   </p:extLst>
 </p:presentation>
@@ -12616,32 +12626,14 @@
         </p:spPr>
         <p:txBody>
           <a:bodyPr spcFirstLastPara="1" wrap="square" lIns="91425" tIns="45700" rIns="91425" bIns="45700" anchor="ctr" anchorCtr="0">
-            <a:normAutofit fontScale="90000"/>
+            <a:noAutofit/>
           </a:bodyPr>
           <a:lstStyle/>
           <a:p>
-            <a:pPr marL="0" lvl="0" indent="0" algn="l" rtl="0">
-              <a:lnSpc>
-                <a:spcPct val="90000"/>
-              </a:lnSpc>
-              <a:spcBef>
-                <a:spcPts val="0"/>
-              </a:spcBef>
-              <a:spcAft>
-                <a:spcPts val="0"/>
-              </a:spcAft>
-              <a:buClr>
-                <a:schemeClr val="dk1"/>
-              </a:buClr>
-              <a:buSzPct val="100000"/>
-              <a:buFont typeface="Calibri"/>
-              <a:buNone/>
-            </a:pPr>
-            <a:r>
-              <a:rPr lang="en-US" dirty="0"/>
-              <a:t>Q#: QM1.1</a:t>
-            </a:r>
-            <a:endParaRPr dirty="0"/>
+            <a:r>
+              <a:rPr lang="en-US" sz="2400" dirty="0"/>
+              <a:t>QM1.1: A TEST QUERY FOR THE TRIGGER CREATED in QD5</a:t>
+            </a:r>
           </a:p>
         </p:txBody>
       </p:sp>
@@ -13123,32 +13115,14 @@
         </p:spPr>
         <p:txBody>
           <a:bodyPr spcFirstLastPara="1" wrap="square" lIns="91425" tIns="45700" rIns="91425" bIns="45700" anchor="ctr" anchorCtr="0">
-            <a:normAutofit fontScale="90000"/>
+            <a:noAutofit/>
           </a:bodyPr>
           <a:lstStyle/>
           <a:p>
-            <a:pPr marL="0" lvl="0" indent="0" algn="l" rtl="0">
-              <a:lnSpc>
-                <a:spcPct val="90000"/>
-              </a:lnSpc>
-              <a:spcBef>
-                <a:spcPts val="0"/>
-              </a:spcBef>
-              <a:spcAft>
-                <a:spcPts val="0"/>
-              </a:spcAft>
-              <a:buClr>
-                <a:schemeClr val="dk1"/>
-              </a:buClr>
-              <a:buSzPct val="100000"/>
-              <a:buFont typeface="Calibri"/>
-              <a:buNone/>
-            </a:pPr>
-            <a:r>
-              <a:rPr lang="en-US" dirty="0"/>
-              <a:t>Q#: QM1.2</a:t>
-            </a:r>
-            <a:endParaRPr dirty="0"/>
+            <a:r>
+              <a:rPr lang="en-US" sz="2000" dirty="0"/>
+              <a:t>QM1.2: A TEST QUERY FOR THE "CHECK" CONSTRAINT DEFINED in QD3</a:t>
+            </a:r>
           </a:p>
         </p:txBody>
       </p:sp>
@@ -13635,32 +13609,14 @@
         </p:spPr>
         <p:txBody>
           <a:bodyPr spcFirstLastPara="1" wrap="square" lIns="91425" tIns="45700" rIns="91425" bIns="45700" anchor="ctr" anchorCtr="0">
-            <a:normAutofit fontScale="90000"/>
+            <a:noAutofit/>
           </a:bodyPr>
           <a:lstStyle/>
           <a:p>
-            <a:pPr marL="0" lvl="0" indent="0" algn="l" rtl="0">
-              <a:lnSpc>
-                <a:spcPct val="90000"/>
-              </a:lnSpc>
-              <a:spcBef>
-                <a:spcPts val="0"/>
-              </a:spcBef>
-              <a:spcAft>
-                <a:spcPts val="0"/>
-              </a:spcAft>
-              <a:buClr>
-                <a:schemeClr val="dk1"/>
-              </a:buClr>
-              <a:buSzPct val="100000"/>
-              <a:buFont typeface="Calibri"/>
-              <a:buNone/>
-            </a:pPr>
-            <a:r>
-              <a:rPr lang="en-US" dirty="0"/>
-              <a:t>Q#: QM1.3</a:t>
-            </a:r>
-            <a:endParaRPr dirty="0"/>
+            <a:r>
+              <a:rPr lang="en-US" sz="2400" dirty="0"/>
+              <a:t>QM1.3: A TEST QUERY FOR THE FK CONSTRAINT DEFINED in QD4</a:t>
+            </a:r>
           </a:p>
         </p:txBody>
       </p:sp>
@@ -14150,7 +14106,7 @@
           <a:p>
             <a:r>
               <a:rPr lang="en-US" dirty="0"/>
-              <a:t>Q#: QM2</a:t>
+              <a:t>QM2: INSERT DATA</a:t>
             </a:r>
           </a:p>
         </p:txBody>
@@ -14469,6 +14425,36 @@
           </a:p>
         </p:txBody>
       </p:sp>
+      <p:pic>
+        <p:nvPicPr>
+          <p:cNvPr id="7" name="Picture 6">
+            <a:extLst>
+              <a:ext uri="{FF2B5EF4-FFF2-40B4-BE49-F238E27FC236}">
+                <a16:creationId xmlns:a16="http://schemas.microsoft.com/office/drawing/2014/main" id="{EA7205D2-82B3-B893-2D4B-85B9CFD1E036}"/>
+              </a:ext>
+            </a:extLst>
+          </p:cNvPr>
+          <p:cNvPicPr>
+            <a:picLocks noChangeAspect="1"/>
+          </p:cNvPicPr>
+          <p:nvPr/>
+        </p:nvPicPr>
+        <p:blipFill>
+          <a:blip r:embed="rId2"/>
+          <a:stretch>
+            <a:fillRect/>
+          </a:stretch>
+        </p:blipFill>
+        <p:spPr>
+          <a:xfrm>
+            <a:off x="5137501" y="2389650"/>
+            <a:ext cx="6487481" cy="2389266"/>
+          </a:xfrm>
+          <a:prstGeom prst="rect">
+            <a:avLst/>
+          </a:prstGeom>
+        </p:spPr>
+      </p:pic>
     </p:spTree>
     <p:extLst>
       <p:ext uri="{BB962C8B-B14F-4D97-AF65-F5344CB8AC3E}">
@@ -14511,8 +14497,8 @@
         </p:nvSpPr>
         <p:spPr>
           <a:xfrm>
-            <a:off x="176893" y="152854"/>
-            <a:ext cx="4313464" cy="443139"/>
+            <a:off x="176892" y="152854"/>
+            <a:ext cx="4574721" cy="443139"/>
           </a:xfrm>
         </p:spPr>
         <p:txBody>
@@ -14523,7 +14509,7 @@
           <a:p>
             <a:r>
               <a:rPr lang="en-US" dirty="0"/>
-              <a:t>Q#: QM3</a:t>
+              <a:t>QM3: UPDATE DATA</a:t>
             </a:r>
           </a:p>
         </p:txBody>
@@ -14754,6 +14740,66 @@
           </a:p>
         </p:txBody>
       </p:sp>
+      <p:pic>
+        <p:nvPicPr>
+          <p:cNvPr id="7" name="Picture 6">
+            <a:extLst>
+              <a:ext uri="{FF2B5EF4-FFF2-40B4-BE49-F238E27FC236}">
+                <a16:creationId xmlns:a16="http://schemas.microsoft.com/office/drawing/2014/main" id="{2C4F5727-3A0B-DE04-005B-CD47C480ABA2}"/>
+              </a:ext>
+            </a:extLst>
+          </p:cNvPr>
+          <p:cNvPicPr>
+            <a:picLocks noChangeAspect="1"/>
+          </p:cNvPicPr>
+          <p:nvPr/>
+        </p:nvPicPr>
+        <p:blipFill>
+          <a:blip r:embed="rId2"/>
+          <a:stretch>
+            <a:fillRect/>
+          </a:stretch>
+        </p:blipFill>
+        <p:spPr>
+          <a:xfrm>
+            <a:off x="5029574" y="722868"/>
+            <a:ext cx="6677957" cy="2419688"/>
+          </a:xfrm>
+          <a:prstGeom prst="rect">
+            <a:avLst/>
+          </a:prstGeom>
+        </p:spPr>
+      </p:pic>
+      <p:pic>
+        <p:nvPicPr>
+          <p:cNvPr id="8" name="Picture 7">
+            <a:extLst>
+              <a:ext uri="{FF2B5EF4-FFF2-40B4-BE49-F238E27FC236}">
+                <a16:creationId xmlns:a16="http://schemas.microsoft.com/office/drawing/2014/main" id="{D66F507C-E9FC-5BFA-454E-8643B9616410}"/>
+              </a:ext>
+            </a:extLst>
+          </p:cNvPr>
+          <p:cNvPicPr>
+            <a:picLocks noChangeAspect="1"/>
+          </p:cNvPicPr>
+          <p:nvPr/>
+        </p:nvPicPr>
+        <p:blipFill>
+          <a:blip r:embed="rId3"/>
+          <a:stretch>
+            <a:fillRect/>
+          </a:stretch>
+        </p:blipFill>
+        <p:spPr>
+          <a:xfrm>
+            <a:off x="5029574" y="3658849"/>
+            <a:ext cx="6868484" cy="2162477"/>
+          </a:xfrm>
+          <a:prstGeom prst="rect">
+            <a:avLst/>
+          </a:prstGeom>
+        </p:spPr>
+      </p:pic>
     </p:spTree>
     <p:extLst>
       <p:ext uri="{BB962C8B-B14F-4D97-AF65-F5344CB8AC3E}">
@@ -14808,7 +14854,7 @@
           <a:p>
             <a:r>
               <a:rPr lang="en-US" dirty="0"/>
-              <a:t>Q#: QM4</a:t>
+              <a:t>QM4: DELETE DATA</a:t>
             </a:r>
           </a:p>
         </p:txBody>
@@ -15000,6 +15046,66 @@
           </a:p>
         </p:txBody>
       </p:sp>
+      <p:pic>
+        <p:nvPicPr>
+          <p:cNvPr id="7" name="Picture 6">
+            <a:extLst>
+              <a:ext uri="{FF2B5EF4-FFF2-40B4-BE49-F238E27FC236}">
+                <a16:creationId xmlns:a16="http://schemas.microsoft.com/office/drawing/2014/main" id="{1A7BE478-E0AD-4A46-0531-CA0CCC9322E6}"/>
+              </a:ext>
+            </a:extLst>
+          </p:cNvPr>
+          <p:cNvPicPr>
+            <a:picLocks noChangeAspect="1"/>
+          </p:cNvPicPr>
+          <p:nvPr/>
+        </p:nvPicPr>
+        <p:blipFill>
+          <a:blip r:embed="rId2"/>
+          <a:stretch>
+            <a:fillRect/>
+          </a:stretch>
+        </p:blipFill>
+        <p:spPr>
+          <a:xfrm>
+            <a:off x="5051075" y="759278"/>
+            <a:ext cx="6814249" cy="2345163"/>
+          </a:xfrm>
+          <a:prstGeom prst="rect">
+            <a:avLst/>
+          </a:prstGeom>
+        </p:spPr>
+      </p:pic>
+      <p:pic>
+        <p:nvPicPr>
+          <p:cNvPr id="8" name="Picture 7">
+            <a:extLst>
+              <a:ext uri="{FF2B5EF4-FFF2-40B4-BE49-F238E27FC236}">
+                <a16:creationId xmlns:a16="http://schemas.microsoft.com/office/drawing/2014/main" id="{02C0CD89-01AB-F948-43BD-542D4F2A36FA}"/>
+              </a:ext>
+            </a:extLst>
+          </p:cNvPr>
+          <p:cNvPicPr>
+            <a:picLocks noChangeAspect="1"/>
+          </p:cNvPicPr>
+          <p:nvPr/>
+        </p:nvPicPr>
+        <p:blipFill>
+          <a:blip r:embed="rId3"/>
+          <a:stretch>
+            <a:fillRect/>
+          </a:stretch>
+        </p:blipFill>
+        <p:spPr>
+          <a:xfrm>
+            <a:off x="5122583" y="3892601"/>
+            <a:ext cx="6536016" cy="1964968"/>
+          </a:xfrm>
+          <a:prstGeom prst="rect">
+            <a:avLst/>
+          </a:prstGeom>
+        </p:spPr>
+      </p:pic>
     </p:spTree>
     <p:extLst>
       <p:ext uri="{BB962C8B-B14F-4D97-AF65-F5344CB8AC3E}">
@@ -15048,13 +15154,13 @@
         </p:spPr>
         <p:txBody>
           <a:bodyPr>
-            <a:normAutofit fontScale="90000"/>
+            <a:noAutofit/>
           </a:bodyPr>
           <a:lstStyle/>
           <a:p>
             <a:r>
-              <a:rPr lang="en-US" dirty="0"/>
-              <a:t>Q#: QM5</a:t>
+              <a:rPr lang="en-US" sz="2400" dirty="0"/>
+              <a:t>QM5: QUERY DATA WITH WHERE CLAUSE</a:t>
             </a:r>
           </a:p>
         </p:txBody>
@@ -15285,6 +15391,66 @@
           </a:p>
         </p:txBody>
       </p:sp>
+      <p:pic>
+        <p:nvPicPr>
+          <p:cNvPr id="7" name="Picture 6">
+            <a:extLst>
+              <a:ext uri="{FF2B5EF4-FFF2-40B4-BE49-F238E27FC236}">
+                <a16:creationId xmlns:a16="http://schemas.microsoft.com/office/drawing/2014/main" id="{0D2A5D4C-EC0D-442F-3E53-773726A21FFF}"/>
+              </a:ext>
+            </a:extLst>
+          </p:cNvPr>
+          <p:cNvPicPr>
+            <a:picLocks noChangeAspect="1"/>
+          </p:cNvPicPr>
+          <p:nvPr/>
+        </p:nvPicPr>
+        <p:blipFill>
+          <a:blip r:embed="rId2"/>
+          <a:stretch>
+            <a:fillRect/>
+          </a:stretch>
+        </p:blipFill>
+        <p:spPr>
+          <a:xfrm>
+            <a:off x="5129333" y="759278"/>
+            <a:ext cx="6657734" cy="1401922"/>
+          </a:xfrm>
+          <a:prstGeom prst="rect">
+            <a:avLst/>
+          </a:prstGeom>
+        </p:spPr>
+      </p:pic>
+      <p:pic>
+        <p:nvPicPr>
+          <p:cNvPr id="8" name="Picture 7">
+            <a:extLst>
+              <a:ext uri="{FF2B5EF4-FFF2-40B4-BE49-F238E27FC236}">
+                <a16:creationId xmlns:a16="http://schemas.microsoft.com/office/drawing/2014/main" id="{5601718C-00D1-F015-B20F-1A71978A2195}"/>
+              </a:ext>
+            </a:extLst>
+          </p:cNvPr>
+          <p:cNvPicPr>
+            <a:picLocks noChangeAspect="1"/>
+          </p:cNvPicPr>
+          <p:nvPr/>
+        </p:nvPicPr>
+        <p:blipFill>
+          <a:blip r:embed="rId3"/>
+          <a:stretch>
+            <a:fillRect/>
+          </a:stretch>
+        </p:blipFill>
+        <p:spPr>
+          <a:xfrm>
+            <a:off x="5340313" y="4261196"/>
+            <a:ext cx="5868219" cy="1724266"/>
+          </a:xfrm>
+          <a:prstGeom prst="rect">
+            <a:avLst/>
+          </a:prstGeom>
+        </p:spPr>
+      </p:pic>
     </p:spTree>
     <p:extLst>
       <p:ext uri="{BB962C8B-B14F-4D97-AF65-F5344CB8AC3E}">
@@ -15333,13 +15499,13 @@
         </p:spPr>
         <p:txBody>
           <a:bodyPr>
-            <a:normAutofit fontScale="90000"/>
+            <a:noAutofit/>
           </a:bodyPr>
           <a:lstStyle/>
           <a:p>
             <a:r>
-              <a:rPr lang="en-US" dirty="0"/>
-              <a:t>Q#: QM6.1</a:t>
+              <a:rPr lang="en-US" sz="2400" dirty="0"/>
+              <a:t>QM6.1: QUERY DATA WITH 'SUB-QUERY IN WHERE CLAUSE'</a:t>
             </a:r>
           </a:p>
         </p:txBody>
@@ -15685,6 +15851,156 @@
           </a:p>
         </p:txBody>
       </p:sp>
+      <p:pic>
+        <p:nvPicPr>
+          <p:cNvPr id="7" name="Picture 6">
+            <a:extLst>
+              <a:ext uri="{FF2B5EF4-FFF2-40B4-BE49-F238E27FC236}">
+                <a16:creationId xmlns:a16="http://schemas.microsoft.com/office/drawing/2014/main" id="{F68E7A5A-3B34-FFA8-4022-2422DF35D1FB}"/>
+              </a:ext>
+            </a:extLst>
+          </p:cNvPr>
+          <p:cNvPicPr>
+            <a:picLocks noChangeAspect="1"/>
+          </p:cNvPicPr>
+          <p:nvPr/>
+        </p:nvPicPr>
+        <p:blipFill>
+          <a:blip r:embed="rId2"/>
+          <a:stretch>
+            <a:fillRect/>
+          </a:stretch>
+        </p:blipFill>
+        <p:spPr>
+          <a:xfrm>
+            <a:off x="5027159" y="595993"/>
+            <a:ext cx="2948941" cy="854213"/>
+          </a:xfrm>
+          <a:prstGeom prst="rect">
+            <a:avLst/>
+          </a:prstGeom>
+        </p:spPr>
+      </p:pic>
+      <p:pic>
+        <p:nvPicPr>
+          <p:cNvPr id="8" name="Picture 7">
+            <a:extLst>
+              <a:ext uri="{FF2B5EF4-FFF2-40B4-BE49-F238E27FC236}">
+                <a16:creationId xmlns:a16="http://schemas.microsoft.com/office/drawing/2014/main" id="{AD6351F4-073A-B047-033A-98ED81FC3074}"/>
+              </a:ext>
+            </a:extLst>
+          </p:cNvPr>
+          <p:cNvPicPr>
+            <a:picLocks noChangeAspect="1"/>
+          </p:cNvPicPr>
+          <p:nvPr/>
+        </p:nvPicPr>
+        <p:blipFill>
+          <a:blip r:embed="rId3"/>
+          <a:stretch>
+            <a:fillRect/>
+          </a:stretch>
+        </p:blipFill>
+        <p:spPr>
+          <a:xfrm>
+            <a:off x="5027159" y="1503480"/>
+            <a:ext cx="6299467" cy="1054349"/>
+          </a:xfrm>
+          <a:prstGeom prst="rect">
+            <a:avLst/>
+          </a:prstGeom>
+        </p:spPr>
+      </p:pic>
+      <p:pic>
+        <p:nvPicPr>
+          <p:cNvPr id="9" name="Picture 8">
+            <a:extLst>
+              <a:ext uri="{FF2B5EF4-FFF2-40B4-BE49-F238E27FC236}">
+                <a16:creationId xmlns:a16="http://schemas.microsoft.com/office/drawing/2014/main" id="{B3AADB29-C81B-6EB9-6D08-1A22E06233FB}"/>
+              </a:ext>
+            </a:extLst>
+          </p:cNvPr>
+          <p:cNvPicPr>
+            <a:picLocks noChangeAspect="1"/>
+          </p:cNvPicPr>
+          <p:nvPr/>
+        </p:nvPicPr>
+        <p:blipFill>
+          <a:blip r:embed="rId4"/>
+          <a:stretch>
+            <a:fillRect/>
+          </a:stretch>
+        </p:blipFill>
+        <p:spPr>
+          <a:xfrm>
+            <a:off x="5027159" y="2611104"/>
+            <a:ext cx="3471382" cy="1144412"/>
+          </a:xfrm>
+          <a:prstGeom prst="rect">
+            <a:avLst/>
+          </a:prstGeom>
+        </p:spPr>
+      </p:pic>
+      <p:pic>
+        <p:nvPicPr>
+          <p:cNvPr id="11" name="Picture 10">
+            <a:extLst>
+              <a:ext uri="{FF2B5EF4-FFF2-40B4-BE49-F238E27FC236}">
+                <a16:creationId xmlns:a16="http://schemas.microsoft.com/office/drawing/2014/main" id="{0E7286E0-A5B2-2525-59CB-E4DDDCC66E8F}"/>
+              </a:ext>
+            </a:extLst>
+          </p:cNvPr>
+          <p:cNvPicPr>
+            <a:picLocks noChangeAspect="1"/>
+          </p:cNvPicPr>
+          <p:nvPr/>
+        </p:nvPicPr>
+        <p:blipFill>
+          <a:blip r:embed="rId5"/>
+          <a:stretch>
+            <a:fillRect/>
+          </a:stretch>
+        </p:blipFill>
+        <p:spPr>
+          <a:xfrm>
+            <a:off x="5027159" y="3808791"/>
+            <a:ext cx="5653298" cy="1144412"/>
+          </a:xfrm>
+          <a:prstGeom prst="rect">
+            <a:avLst/>
+          </a:prstGeom>
+        </p:spPr>
+      </p:pic>
+      <p:pic>
+        <p:nvPicPr>
+          <p:cNvPr id="12" name="Picture 11">
+            <a:extLst>
+              <a:ext uri="{FF2B5EF4-FFF2-40B4-BE49-F238E27FC236}">
+                <a16:creationId xmlns:a16="http://schemas.microsoft.com/office/drawing/2014/main" id="{859AF698-FA18-3EE8-FB52-E8FC316B820B}"/>
+              </a:ext>
+            </a:extLst>
+          </p:cNvPr>
+          <p:cNvPicPr>
+            <a:picLocks noChangeAspect="1"/>
+          </p:cNvPicPr>
+          <p:nvPr/>
+        </p:nvPicPr>
+        <p:blipFill>
+          <a:blip r:embed="rId6"/>
+          <a:stretch>
+            <a:fillRect/>
+          </a:stretch>
+        </p:blipFill>
+        <p:spPr>
+          <a:xfrm>
+            <a:off x="5813007" y="5167843"/>
+            <a:ext cx="5166517" cy="1370525"/>
+          </a:xfrm>
+          <a:prstGeom prst="rect">
+            <a:avLst/>
+          </a:prstGeom>
+        </p:spPr>
+      </p:pic>
     </p:spTree>
     <p:extLst>
       <p:ext uri="{BB962C8B-B14F-4D97-AF65-F5344CB8AC3E}">
@@ -15733,13 +16049,13 @@
         </p:spPr>
         <p:txBody>
           <a:bodyPr>
-            <a:normAutofit fontScale="90000"/>
+            <a:noAutofit/>
           </a:bodyPr>
           <a:lstStyle/>
           <a:p>
             <a:r>
-              <a:rPr lang="en-US" dirty="0"/>
-              <a:t>Q#: QM6.2</a:t>
+              <a:rPr lang="en-US" sz="2400" dirty="0"/>
+              <a:t>QM6.2: QUERY DATA WITH SUB-QUERY IN FROM CLAUSE</a:t>
             </a:r>
           </a:p>
         </p:txBody>
@@ -16050,6 +16366,96 @@
           </a:p>
         </p:txBody>
       </p:sp>
+      <p:pic>
+        <p:nvPicPr>
+          <p:cNvPr id="7" name="Picture 6">
+            <a:extLst>
+              <a:ext uri="{FF2B5EF4-FFF2-40B4-BE49-F238E27FC236}">
+                <a16:creationId xmlns:a16="http://schemas.microsoft.com/office/drawing/2014/main" id="{4345356F-FE7A-AACC-8A11-3B43BF3DF327}"/>
+              </a:ext>
+            </a:extLst>
+          </p:cNvPr>
+          <p:cNvPicPr>
+            <a:picLocks noChangeAspect="1"/>
+          </p:cNvPicPr>
+          <p:nvPr/>
+        </p:nvPicPr>
+        <p:blipFill>
+          <a:blip r:embed="rId2"/>
+          <a:stretch>
+            <a:fillRect/>
+          </a:stretch>
+        </p:blipFill>
+        <p:spPr>
+          <a:xfrm>
+            <a:off x="5067112" y="819559"/>
+            <a:ext cx="4736954" cy="1078112"/>
+          </a:xfrm>
+          <a:prstGeom prst="rect">
+            <a:avLst/>
+          </a:prstGeom>
+        </p:spPr>
+      </p:pic>
+      <p:pic>
+        <p:nvPicPr>
+          <p:cNvPr id="8" name="Picture 7">
+            <a:extLst>
+              <a:ext uri="{FF2B5EF4-FFF2-40B4-BE49-F238E27FC236}">
+                <a16:creationId xmlns:a16="http://schemas.microsoft.com/office/drawing/2014/main" id="{8E5B03E5-9A7C-3759-F480-B5DFA9395E79}"/>
+              </a:ext>
+            </a:extLst>
+          </p:cNvPr>
+          <p:cNvPicPr>
+            <a:picLocks noChangeAspect="1"/>
+          </p:cNvPicPr>
+          <p:nvPr/>
+        </p:nvPicPr>
+        <p:blipFill>
+          <a:blip r:embed="rId3"/>
+          <a:stretch>
+            <a:fillRect/>
+          </a:stretch>
+        </p:blipFill>
+        <p:spPr>
+          <a:xfrm>
+            <a:off x="5067112" y="1974638"/>
+            <a:ext cx="6758380" cy="1171973"/>
+          </a:xfrm>
+          <a:prstGeom prst="rect">
+            <a:avLst/>
+          </a:prstGeom>
+        </p:spPr>
+      </p:pic>
+      <p:pic>
+        <p:nvPicPr>
+          <p:cNvPr id="9" name="Picture 8">
+            <a:extLst>
+              <a:ext uri="{FF2B5EF4-FFF2-40B4-BE49-F238E27FC236}">
+                <a16:creationId xmlns:a16="http://schemas.microsoft.com/office/drawing/2014/main" id="{C73A8B4B-7DB3-7A22-B69B-9A23BBF4ECE8}"/>
+              </a:ext>
+            </a:extLst>
+          </p:cNvPr>
+          <p:cNvPicPr>
+            <a:picLocks noChangeAspect="1"/>
+          </p:cNvPicPr>
+          <p:nvPr/>
+        </p:nvPicPr>
+        <p:blipFill>
+          <a:blip r:embed="rId4"/>
+          <a:stretch>
+            <a:fillRect/>
+          </a:stretch>
+        </p:blipFill>
+        <p:spPr>
+          <a:xfrm>
+            <a:off x="6033748" y="4570770"/>
+            <a:ext cx="4991161" cy="1608154"/>
+          </a:xfrm>
+          <a:prstGeom prst="rect">
+            <a:avLst/>
+          </a:prstGeom>
+        </p:spPr>
+      </p:pic>
     </p:spTree>
     <p:extLst>
       <p:ext uri="{BB962C8B-B14F-4D97-AF65-F5344CB8AC3E}">
@@ -16098,13 +16504,13 @@
         </p:spPr>
         <p:txBody>
           <a:bodyPr>
-            <a:normAutofit fontScale="90000"/>
+            <a:noAutofit/>
           </a:bodyPr>
           <a:lstStyle/>
           <a:p>
             <a:r>
-              <a:rPr lang="en-US" dirty="0"/>
-              <a:t>Q#: QM6.3</a:t>
+              <a:rPr lang="en-US" sz="2400" dirty="0"/>
+              <a:t>QM6.3: QUERY DATA WITH 'SUB-QUERY IN SELECT CLAUSE'</a:t>
             </a:r>
           </a:p>
         </p:txBody>
@@ -16406,6 +16812,96 @@
           </a:p>
         </p:txBody>
       </p:sp>
+      <p:pic>
+        <p:nvPicPr>
+          <p:cNvPr id="7" name="Picture 6">
+            <a:extLst>
+              <a:ext uri="{FF2B5EF4-FFF2-40B4-BE49-F238E27FC236}">
+                <a16:creationId xmlns:a16="http://schemas.microsoft.com/office/drawing/2014/main" id="{B2B93FAB-0E04-EFC6-309F-AC6C1F20E539}"/>
+              </a:ext>
+            </a:extLst>
+          </p:cNvPr>
+          <p:cNvPicPr>
+            <a:picLocks noChangeAspect="1"/>
+          </p:cNvPicPr>
+          <p:nvPr/>
+        </p:nvPicPr>
+        <p:blipFill>
+          <a:blip r:embed="rId2"/>
+          <a:stretch>
+            <a:fillRect/>
+          </a:stretch>
+        </p:blipFill>
+        <p:spPr>
+          <a:xfrm>
+            <a:off x="5035940" y="595993"/>
+            <a:ext cx="6844519" cy="1292164"/>
+          </a:xfrm>
+          <a:prstGeom prst="rect">
+            <a:avLst/>
+          </a:prstGeom>
+        </p:spPr>
+      </p:pic>
+      <p:pic>
+        <p:nvPicPr>
+          <p:cNvPr id="8" name="Picture 7">
+            <a:extLst>
+              <a:ext uri="{FF2B5EF4-FFF2-40B4-BE49-F238E27FC236}">
+                <a16:creationId xmlns:a16="http://schemas.microsoft.com/office/drawing/2014/main" id="{92B95658-879D-3386-0829-E71796007915}"/>
+              </a:ext>
+            </a:extLst>
+          </p:cNvPr>
+          <p:cNvPicPr>
+            <a:picLocks noChangeAspect="1"/>
+          </p:cNvPicPr>
+          <p:nvPr/>
+        </p:nvPicPr>
+        <p:blipFill>
+          <a:blip r:embed="rId3"/>
+          <a:stretch>
+            <a:fillRect/>
+          </a:stretch>
+        </p:blipFill>
+        <p:spPr>
+          <a:xfrm>
+            <a:off x="5035940" y="1947916"/>
+            <a:ext cx="6599620" cy="1481084"/>
+          </a:xfrm>
+          <a:prstGeom prst="rect">
+            <a:avLst/>
+          </a:prstGeom>
+        </p:spPr>
+      </p:pic>
+      <p:pic>
+        <p:nvPicPr>
+          <p:cNvPr id="9" name="Picture 8">
+            <a:extLst>
+              <a:ext uri="{FF2B5EF4-FFF2-40B4-BE49-F238E27FC236}">
+                <a16:creationId xmlns:a16="http://schemas.microsoft.com/office/drawing/2014/main" id="{103DAFCE-BD18-410D-4DAD-EB771F212311}"/>
+              </a:ext>
+            </a:extLst>
+          </p:cNvPr>
+          <p:cNvPicPr>
+            <a:picLocks noChangeAspect="1"/>
+          </p:cNvPicPr>
+          <p:nvPr/>
+        </p:nvPicPr>
+        <p:blipFill>
+          <a:blip r:embed="rId4"/>
+          <a:stretch>
+            <a:fillRect/>
+          </a:stretch>
+        </p:blipFill>
+        <p:spPr>
+          <a:xfrm>
+            <a:off x="6054193" y="4237153"/>
+            <a:ext cx="4673707" cy="1639212"/>
+          </a:xfrm>
+          <a:prstGeom prst="rect">
+            <a:avLst/>
+          </a:prstGeom>
+        </p:spPr>
+      </p:pic>
     </p:spTree>
     <p:extLst>
       <p:ext uri="{BB962C8B-B14F-4D97-AF65-F5344CB8AC3E}">
@@ -16646,19 +17142,19 @@
         </p:nvSpPr>
         <p:spPr>
           <a:xfrm>
-            <a:off x="176893" y="152854"/>
-            <a:ext cx="4313464" cy="443139"/>
+            <a:off x="176892" y="152854"/>
+            <a:ext cx="4484007" cy="443139"/>
           </a:xfrm>
         </p:spPr>
         <p:txBody>
           <a:bodyPr>
-            <a:normAutofit fontScale="90000"/>
+            <a:noAutofit/>
           </a:bodyPr>
           <a:lstStyle/>
           <a:p>
             <a:r>
-              <a:rPr lang="en-US" dirty="0"/>
-              <a:t>Q#: QM7</a:t>
+              <a:rPr lang="en-US" sz="2800" dirty="0"/>
+              <a:t>QM7: QUERY DATA WITH EXCEPT</a:t>
             </a:r>
           </a:p>
         </p:txBody>
@@ -16971,6 +17467,96 @@
           </a:p>
         </p:txBody>
       </p:sp>
+      <p:pic>
+        <p:nvPicPr>
+          <p:cNvPr id="7" name="Picture 6">
+            <a:extLst>
+              <a:ext uri="{FF2B5EF4-FFF2-40B4-BE49-F238E27FC236}">
+                <a16:creationId xmlns:a16="http://schemas.microsoft.com/office/drawing/2014/main" id="{DCB56FF8-0DDB-45FC-F0BB-CB6CA9A3DB48}"/>
+              </a:ext>
+            </a:extLst>
+          </p:cNvPr>
+          <p:cNvPicPr>
+            <a:picLocks noChangeAspect="1"/>
+          </p:cNvPicPr>
+          <p:nvPr/>
+        </p:nvPicPr>
+        <p:blipFill>
+          <a:blip r:embed="rId2"/>
+          <a:stretch>
+            <a:fillRect/>
+          </a:stretch>
+        </p:blipFill>
+        <p:spPr>
+          <a:xfrm>
+            <a:off x="5029199" y="659297"/>
+            <a:ext cx="6690979" cy="1434185"/>
+          </a:xfrm>
+          <a:prstGeom prst="rect">
+            <a:avLst/>
+          </a:prstGeom>
+        </p:spPr>
+      </p:pic>
+      <p:pic>
+        <p:nvPicPr>
+          <p:cNvPr id="8" name="Picture 7">
+            <a:extLst>
+              <a:ext uri="{FF2B5EF4-FFF2-40B4-BE49-F238E27FC236}">
+                <a16:creationId xmlns:a16="http://schemas.microsoft.com/office/drawing/2014/main" id="{45522715-1F03-AD2F-FA99-3ED9B02A65EB}"/>
+              </a:ext>
+            </a:extLst>
+          </p:cNvPr>
+          <p:cNvPicPr>
+            <a:picLocks noChangeAspect="1"/>
+          </p:cNvPicPr>
+          <p:nvPr/>
+        </p:nvPicPr>
+        <p:blipFill>
+          <a:blip r:embed="rId3"/>
+          <a:stretch>
+            <a:fillRect/>
+          </a:stretch>
+        </p:blipFill>
+        <p:spPr>
+          <a:xfrm>
+            <a:off x="5029199" y="2216494"/>
+            <a:ext cx="4232937" cy="960120"/>
+          </a:xfrm>
+          <a:prstGeom prst="rect">
+            <a:avLst/>
+          </a:prstGeom>
+        </p:spPr>
+      </p:pic>
+      <p:pic>
+        <p:nvPicPr>
+          <p:cNvPr id="9" name="Picture 8">
+            <a:extLst>
+              <a:ext uri="{FF2B5EF4-FFF2-40B4-BE49-F238E27FC236}">
+                <a16:creationId xmlns:a16="http://schemas.microsoft.com/office/drawing/2014/main" id="{F3BC2011-23F3-3C99-7D05-2CC8CF261A17}"/>
+              </a:ext>
+            </a:extLst>
+          </p:cNvPr>
+          <p:cNvPicPr>
+            <a:picLocks noChangeAspect="1"/>
+          </p:cNvPicPr>
+          <p:nvPr/>
+        </p:nvPicPr>
+        <p:blipFill>
+          <a:blip r:embed="rId4"/>
+          <a:stretch>
+            <a:fillRect/>
+          </a:stretch>
+        </p:blipFill>
+        <p:spPr>
+          <a:xfrm>
+            <a:off x="5917983" y="4434095"/>
+            <a:ext cx="4913410" cy="1434185"/>
+          </a:xfrm>
+          <a:prstGeom prst="rect">
+            <a:avLst/>
+          </a:prstGeom>
+        </p:spPr>
+      </p:pic>
     </p:spTree>
     <p:extLst>
       <p:ext uri="{BB962C8B-B14F-4D97-AF65-F5344CB8AC3E}">
@@ -17019,13 +17605,13 @@
         </p:spPr>
         <p:txBody>
           <a:bodyPr>
-            <a:normAutofit fontScale="90000"/>
+            <a:noAutofit/>
           </a:bodyPr>
           <a:lstStyle/>
           <a:p>
             <a:r>
-              <a:rPr lang="en-US" dirty="0"/>
-              <a:t>Q#: QM8.1</a:t>
+              <a:rPr lang="en-US" sz="2400" dirty="0"/>
+              <a:t>QM8.1: QUERY DATA WITH ANY/SOME</a:t>
             </a:r>
           </a:p>
         </p:txBody>
@@ -17312,6 +17898,96 @@
           </a:p>
         </p:txBody>
       </p:sp>
+      <p:pic>
+        <p:nvPicPr>
+          <p:cNvPr id="7" name="Picture 6">
+            <a:extLst>
+              <a:ext uri="{FF2B5EF4-FFF2-40B4-BE49-F238E27FC236}">
+                <a16:creationId xmlns:a16="http://schemas.microsoft.com/office/drawing/2014/main" id="{59AB1BBD-5370-BED6-A6D7-3CC7A303B872}"/>
+              </a:ext>
+            </a:extLst>
+          </p:cNvPr>
+          <p:cNvPicPr>
+            <a:picLocks noChangeAspect="1"/>
+          </p:cNvPicPr>
+          <p:nvPr/>
+        </p:nvPicPr>
+        <p:blipFill>
+          <a:blip r:embed="rId2"/>
+          <a:stretch>
+            <a:fillRect/>
+          </a:stretch>
+        </p:blipFill>
+        <p:spPr>
+          <a:xfrm>
+            <a:off x="5018324" y="643295"/>
+            <a:ext cx="3315181" cy="1043325"/>
+          </a:xfrm>
+          <a:prstGeom prst="rect">
+            <a:avLst/>
+          </a:prstGeom>
+        </p:spPr>
+      </p:pic>
+      <p:pic>
+        <p:nvPicPr>
+          <p:cNvPr id="8" name="Picture 7">
+            <a:extLst>
+              <a:ext uri="{FF2B5EF4-FFF2-40B4-BE49-F238E27FC236}">
+                <a16:creationId xmlns:a16="http://schemas.microsoft.com/office/drawing/2014/main" id="{1B55EF2B-AB33-7AC0-C85C-53E8A7C5116B}"/>
+              </a:ext>
+            </a:extLst>
+          </p:cNvPr>
+          <p:cNvPicPr>
+            <a:picLocks noChangeAspect="1"/>
+          </p:cNvPicPr>
+          <p:nvPr/>
+        </p:nvPicPr>
+        <p:blipFill>
+          <a:blip r:embed="rId3"/>
+          <a:stretch>
+            <a:fillRect/>
+          </a:stretch>
+        </p:blipFill>
+        <p:spPr>
+          <a:xfrm>
+            <a:off x="5018324" y="1793631"/>
+            <a:ext cx="6879751" cy="1277748"/>
+          </a:xfrm>
+          <a:prstGeom prst="rect">
+            <a:avLst/>
+          </a:prstGeom>
+        </p:spPr>
+      </p:pic>
+      <p:pic>
+        <p:nvPicPr>
+          <p:cNvPr id="9" name="Picture 8">
+            <a:extLst>
+              <a:ext uri="{FF2B5EF4-FFF2-40B4-BE49-F238E27FC236}">
+                <a16:creationId xmlns:a16="http://schemas.microsoft.com/office/drawing/2014/main" id="{6EBD6775-3936-7510-E82E-4F02522BC703}"/>
+              </a:ext>
+            </a:extLst>
+          </p:cNvPr>
+          <p:cNvPicPr>
+            <a:picLocks noChangeAspect="1"/>
+          </p:cNvPicPr>
+          <p:nvPr/>
+        </p:nvPicPr>
+        <p:blipFill>
+          <a:blip r:embed="rId4"/>
+          <a:stretch>
+            <a:fillRect/>
+          </a:stretch>
+        </p:blipFill>
+        <p:spPr>
+          <a:xfrm>
+            <a:off x="5704750" y="4033147"/>
+            <a:ext cx="5257509" cy="2038199"/>
+          </a:xfrm>
+          <a:prstGeom prst="rect">
+            <a:avLst/>
+          </a:prstGeom>
+        </p:spPr>
+      </p:pic>
     </p:spTree>
     <p:extLst>
       <p:ext uri="{BB962C8B-B14F-4D97-AF65-F5344CB8AC3E}">
@@ -17360,13 +18036,13 @@
         </p:spPr>
         <p:txBody>
           <a:bodyPr>
-            <a:normAutofit fontScale="90000"/>
+            <a:noAutofit/>
           </a:bodyPr>
           <a:lstStyle/>
           <a:p>
             <a:r>
-              <a:rPr lang="en-US" dirty="0"/>
-              <a:t>Q#: QM8.2</a:t>
+              <a:rPr lang="en-US" sz="2400" dirty="0"/>
+              <a:t>QM8.2: QUERY DATA WITH ALL in front of a sub-query</a:t>
             </a:r>
           </a:p>
         </p:txBody>
@@ -17653,6 +18329,96 @@
           </a:p>
         </p:txBody>
       </p:sp>
+      <p:pic>
+        <p:nvPicPr>
+          <p:cNvPr id="7" name="Picture 6">
+            <a:extLst>
+              <a:ext uri="{FF2B5EF4-FFF2-40B4-BE49-F238E27FC236}">
+                <a16:creationId xmlns:a16="http://schemas.microsoft.com/office/drawing/2014/main" id="{A8D88296-6C41-5DDD-0E73-38EB86964F1C}"/>
+              </a:ext>
+            </a:extLst>
+          </p:cNvPr>
+          <p:cNvPicPr>
+            <a:picLocks noChangeAspect="1"/>
+          </p:cNvPicPr>
+          <p:nvPr/>
+        </p:nvPicPr>
+        <p:blipFill>
+          <a:blip r:embed="rId2"/>
+          <a:stretch>
+            <a:fillRect/>
+          </a:stretch>
+        </p:blipFill>
+        <p:spPr>
+          <a:xfrm>
+            <a:off x="5018324" y="643295"/>
+            <a:ext cx="3315181" cy="1043325"/>
+          </a:xfrm>
+          <a:prstGeom prst="rect">
+            <a:avLst/>
+          </a:prstGeom>
+        </p:spPr>
+      </p:pic>
+      <p:pic>
+        <p:nvPicPr>
+          <p:cNvPr id="8" name="Picture 7">
+            <a:extLst>
+              <a:ext uri="{FF2B5EF4-FFF2-40B4-BE49-F238E27FC236}">
+                <a16:creationId xmlns:a16="http://schemas.microsoft.com/office/drawing/2014/main" id="{8080BEC2-5921-6A21-A8E2-275B64710D17}"/>
+              </a:ext>
+            </a:extLst>
+          </p:cNvPr>
+          <p:cNvPicPr>
+            <a:picLocks noChangeAspect="1"/>
+          </p:cNvPicPr>
+          <p:nvPr/>
+        </p:nvPicPr>
+        <p:blipFill>
+          <a:blip r:embed="rId3"/>
+          <a:stretch>
+            <a:fillRect/>
+          </a:stretch>
+        </p:blipFill>
+        <p:spPr>
+          <a:xfrm>
+            <a:off x="5018324" y="1793631"/>
+            <a:ext cx="6879751" cy="1277748"/>
+          </a:xfrm>
+          <a:prstGeom prst="rect">
+            <a:avLst/>
+          </a:prstGeom>
+        </p:spPr>
+      </p:pic>
+      <p:pic>
+        <p:nvPicPr>
+          <p:cNvPr id="9" name="Picture 8">
+            <a:extLst>
+              <a:ext uri="{FF2B5EF4-FFF2-40B4-BE49-F238E27FC236}">
+                <a16:creationId xmlns:a16="http://schemas.microsoft.com/office/drawing/2014/main" id="{FD0470A8-FE5E-6326-8A32-51CABF536667}"/>
+              </a:ext>
+            </a:extLst>
+          </p:cNvPr>
+          <p:cNvPicPr>
+            <a:picLocks noChangeAspect="1"/>
+          </p:cNvPicPr>
+          <p:nvPr/>
+        </p:nvPicPr>
+        <p:blipFill>
+          <a:blip r:embed="rId4"/>
+          <a:stretch>
+            <a:fillRect/>
+          </a:stretch>
+        </p:blipFill>
+        <p:spPr>
+          <a:xfrm>
+            <a:off x="5740807" y="4413924"/>
+            <a:ext cx="5434784" cy="1153157"/>
+          </a:xfrm>
+          <a:prstGeom prst="rect">
+            <a:avLst/>
+          </a:prstGeom>
+        </p:spPr>
+      </p:pic>
     </p:spTree>
     <p:extLst>
       <p:ext uri="{BB962C8B-B14F-4D97-AF65-F5344CB8AC3E}">
@@ -17671,7 +18437,7 @@
   <p:cSld>
     <p:spTree>
       <p:nvGrpSpPr>
-        <p:cNvPr id="1" name="Shape 192"/>
+        <p:cNvPr id="1" name=""/>
         <p:cNvGrpSpPr/>
         <p:nvPr/>
       </p:nvGrpSpPr>
@@ -17685,8 +18451,246 @@
       </p:grpSpPr>
       <p:sp>
         <p:nvSpPr>
-          <p:cNvPr id="193" name="Google Shape;193;p6"/>
-          <p:cNvSpPr txBox="1">
+          <p:cNvPr id="3" name="Content Placeholder 2"/>
+          <p:cNvSpPr>
+            <a:spLocks noGrp="1"/>
+          </p:cNvSpPr>
+          <p:nvPr>
+            <p:ph idx="1"/>
+          </p:nvPr>
+        </p:nvSpPr>
+        <p:spPr>
+          <a:xfrm>
+            <a:off x="119741" y="2334985"/>
+            <a:ext cx="4631873" cy="4318907"/>
+          </a:xfrm>
+        </p:spPr>
+        <p:style>
+          <a:lnRef idx="2">
+            <a:schemeClr val="accent6"/>
+          </a:lnRef>
+          <a:fillRef idx="1">
+            <a:schemeClr val="lt1"/>
+          </a:fillRef>
+          <a:effectRef idx="0">
+            <a:schemeClr val="accent6"/>
+          </a:effectRef>
+          <a:fontRef idx="minor">
+            <a:schemeClr val="dk1"/>
+          </a:fontRef>
+        </p:style>
+        <p:txBody>
+          <a:bodyPr>
+            <a:normAutofit fontScale="62500" lnSpcReduction="20000"/>
+          </a:bodyPr>
+          <a:lstStyle/>
+          <a:p>
+            <a:r>
+              <a:rPr lang="en-US" dirty="0"/>
+              <a:t>SQL Query:</a:t>
+            </a:r>
+          </a:p>
+          <a:p>
+            <a:pPr marL="114300" indent="0">
+              <a:buNone/>
+            </a:pPr>
+            <a:r>
+              <a:rPr lang="en-US" dirty="0"/>
+              <a:t>SELECT </a:t>
+            </a:r>
+            <a:r>
+              <a:rPr lang="en-US" dirty="0" err="1"/>
+              <a:t>u.first_name</a:t>
+            </a:r>
+            <a:r>
+              <a:rPr lang="en-US" dirty="0"/>
+              <a:t>, </a:t>
+            </a:r>
+            <a:r>
+              <a:rPr lang="en-US" dirty="0" err="1"/>
+              <a:t>u.last_name</a:t>
+            </a:r>
+            <a:r>
+              <a:rPr lang="en-US" dirty="0"/>
+              <a:t>,</a:t>
+            </a:r>
+          </a:p>
+          <a:p>
+            <a:pPr marL="114300" indent="0">
+              <a:buNone/>
+            </a:pPr>
+            <a:r>
+              <a:rPr lang="en-US" dirty="0"/>
+              <a:t>       </a:t>
+            </a:r>
+            <a:r>
+              <a:rPr lang="en-US" dirty="0" err="1"/>
+              <a:t>p.product_name</a:t>
+            </a:r>
+            <a:r>
+              <a:rPr lang="en-US" dirty="0"/>
+              <a:t>, </a:t>
+            </a:r>
+            <a:r>
+              <a:rPr lang="en-US" dirty="0" err="1"/>
+              <a:t>p.price</a:t>
+            </a:r>
+            <a:r>
+              <a:rPr lang="en-US" dirty="0"/>
+              <a:t>,</a:t>
+            </a:r>
+          </a:p>
+          <a:p>
+            <a:pPr marL="114300" indent="0">
+              <a:buNone/>
+            </a:pPr>
+            <a:r>
+              <a:rPr lang="en-US" dirty="0"/>
+              <a:t>       </a:t>
+            </a:r>
+            <a:r>
+              <a:rPr lang="en-US" dirty="0" err="1"/>
+              <a:t>pay.amount</a:t>
+            </a:r>
+            <a:r>
+              <a:rPr lang="en-US" dirty="0"/>
+              <a:t>, </a:t>
+            </a:r>
+            <a:r>
+              <a:rPr lang="en-US" dirty="0" err="1"/>
+              <a:t>pay.platform_commission</a:t>
+            </a:r>
+            <a:r>
+              <a:rPr lang="en-US" dirty="0"/>
+              <a:t>, </a:t>
+            </a:r>
+            <a:r>
+              <a:rPr lang="en-US" dirty="0" err="1"/>
+              <a:t>pay.seller_earning</a:t>
+            </a:r>
+            <a:endParaRPr lang="en-US" dirty="0"/>
+          </a:p>
+          <a:p>
+            <a:pPr marL="114300" indent="0">
+              <a:buNone/>
+            </a:pPr>
+            <a:r>
+              <a:rPr lang="en-US" dirty="0"/>
+              <a:t>FROM Payments pay</a:t>
+            </a:r>
+          </a:p>
+          <a:p>
+            <a:pPr marL="114300" indent="0">
+              <a:buNone/>
+            </a:pPr>
+            <a:r>
+              <a:rPr lang="en-US" dirty="0"/>
+              <a:t>INNER JOIN Subscriptions s ON </a:t>
+            </a:r>
+            <a:r>
+              <a:rPr lang="en-US" dirty="0" err="1"/>
+              <a:t>pay.subscription_id</a:t>
+            </a:r>
+            <a:r>
+              <a:rPr lang="en-US" dirty="0"/>
+              <a:t> = </a:t>
+            </a:r>
+            <a:r>
+              <a:rPr lang="en-US" dirty="0" err="1"/>
+              <a:t>s.subscription_id</a:t>
+            </a:r>
+            <a:endParaRPr lang="en-US" dirty="0"/>
+          </a:p>
+          <a:p>
+            <a:pPr marL="114300" indent="0">
+              <a:buNone/>
+            </a:pPr>
+            <a:r>
+              <a:rPr lang="en-US" dirty="0"/>
+              <a:t>INNER JOIN Users u ON </a:t>
+            </a:r>
+            <a:r>
+              <a:rPr lang="en-US" dirty="0" err="1"/>
+              <a:t>s.buyer_id</a:t>
+            </a:r>
+            <a:r>
+              <a:rPr lang="en-US" dirty="0"/>
+              <a:t>  = </a:t>
+            </a:r>
+            <a:r>
+              <a:rPr lang="en-US" dirty="0" err="1"/>
+              <a:t>u.user_id</a:t>
+            </a:r>
+            <a:endParaRPr lang="en-US" dirty="0"/>
+          </a:p>
+          <a:p>
+            <a:pPr marL="114300" indent="0">
+              <a:buNone/>
+            </a:pPr>
+            <a:r>
+              <a:rPr lang="en-US" dirty="0"/>
+              <a:t>INNER JOIN Products p ON </a:t>
+            </a:r>
+            <a:r>
+              <a:rPr lang="en-US" dirty="0" err="1"/>
+              <a:t>s.product_id</a:t>
+            </a:r>
+            <a:r>
+              <a:rPr lang="en-US" dirty="0"/>
+              <a:t> = </a:t>
+            </a:r>
+            <a:r>
+              <a:rPr lang="en-US" dirty="0" err="1"/>
+              <a:t>p.product_id</a:t>
+            </a:r>
+            <a:endParaRPr lang="en-US" dirty="0"/>
+          </a:p>
+          <a:p>
+            <a:pPr marL="114300" indent="0">
+              <a:buNone/>
+            </a:pPr>
+            <a:r>
+              <a:rPr lang="en-US" dirty="0"/>
+              <a:t>WHERE </a:t>
+            </a:r>
+            <a:r>
+              <a:rPr lang="en-US" dirty="0" err="1"/>
+              <a:t>p.price</a:t>
+            </a:r>
+            <a:r>
+              <a:rPr lang="en-US" dirty="0"/>
+              <a:t> &gt; 30.00</a:t>
+            </a:r>
+          </a:p>
+          <a:p>
+            <a:pPr marL="114300" indent="0">
+              <a:buNone/>
+            </a:pPr>
+            <a:r>
+              <a:rPr lang="en-US" dirty="0"/>
+              <a:t>  AND </a:t>
+            </a:r>
+            <a:r>
+              <a:rPr lang="en-US" dirty="0" err="1"/>
+              <a:t>s.status</a:t>
+            </a:r>
+            <a:r>
+              <a:rPr lang="en-US" dirty="0"/>
+              <a:t> = 'active';</a:t>
+            </a:r>
+          </a:p>
+          <a:p>
+            <a:pPr marL="114300" indent="0">
+              <a:buNone/>
+            </a:pPr>
+            <a:endParaRPr lang="en-US" dirty="0"/>
+          </a:p>
+        </p:txBody>
+      </p:sp>
+      <p:sp>
+        <p:nvSpPr>
+          <p:cNvPr id="2" name="Title 1"/>
+          <p:cNvSpPr>
             <a:spLocks noGrp="1"/>
           </p:cNvSpPr>
           <p:nvPr>
@@ -17695,183 +18699,2801 @@
         </p:nvSpPr>
         <p:spPr>
           <a:xfrm>
-            <a:off x="838200" y="365125"/>
-            <a:ext cx="10515600" cy="1325563"/>
-          </a:xfrm>
-          <a:prstGeom prst="rect">
-            <a:avLst/>
-          </a:prstGeom>
-          <a:noFill/>
-          <a:ln>
-            <a:noFill/>
-          </a:ln>
+            <a:off x="176893" y="152854"/>
+            <a:ext cx="4313464" cy="443139"/>
+          </a:xfrm>
         </p:spPr>
         <p:txBody>
-          <a:bodyPr spcFirstLastPara="1" wrap="square" lIns="91425" tIns="45700" rIns="91425" bIns="45700" anchor="ctr" anchorCtr="0">
-            <a:normAutofit/>
+          <a:bodyPr>
+            <a:noAutofit/>
           </a:bodyPr>
           <a:lstStyle/>
           <a:p>
-            <a:pPr marL="0" lvl="0" indent="0" algn="l" rtl="0">
-              <a:lnSpc>
-                <a:spcPct val="90000"/>
-              </a:lnSpc>
-              <a:spcBef>
-                <a:spcPts val="0"/>
-              </a:spcBef>
-              <a:spcAft>
-                <a:spcPts val="0"/>
-              </a:spcAft>
-              <a:buClr>
-                <a:schemeClr val="dk1"/>
-              </a:buClr>
-              <a:buSzPts val="4400"/>
-              <a:buFont typeface="Calibri"/>
-              <a:buNone/>
-            </a:pPr>
-            <a:r>
-              <a:rPr lang="en-US"/>
-              <a:t>Credits and References</a:t>
-            </a:r>
-            <a:endParaRPr/>
+            <a:r>
+              <a:rPr lang="en-US" sz="2400" dirty="0"/>
+              <a:t>QM9.1: INNER-JOIN-QUERY WITH WHERE CLAUSE</a:t>
+            </a:r>
           </a:p>
         </p:txBody>
       </p:sp>
       <p:sp>
         <p:nvSpPr>
-          <p:cNvPr id="194" name="Google Shape;194;p6"/>
-          <p:cNvSpPr txBox="1">
+          <p:cNvPr id="4" name="Rectangle 3"/>
+          <p:cNvSpPr/>
+          <p:nvPr/>
+        </p:nvSpPr>
+        <p:spPr>
+          <a:xfrm>
+            <a:off x="4955721" y="536285"/>
+            <a:ext cx="7004958" cy="6109444"/>
+          </a:xfrm>
+          <a:prstGeom prst="rect">
+            <a:avLst/>
+          </a:prstGeom>
+        </p:spPr>
+        <p:style>
+          <a:lnRef idx="2">
+            <a:schemeClr val="accent4"/>
+          </a:lnRef>
+          <a:fillRef idx="1">
+            <a:schemeClr val="lt1"/>
+          </a:fillRef>
+          <a:effectRef idx="0">
+            <a:schemeClr val="accent4"/>
+          </a:effectRef>
+          <a:fontRef idx="minor">
+            <a:schemeClr val="dk1"/>
+          </a:fontRef>
+        </p:style>
+        <p:txBody>
+          <a:bodyPr rtlCol="0" anchor="ctr"/>
+          <a:lstStyle/>
+          <a:p>
+            <a:pPr algn="ctr"/>
+            <a:endParaRPr lang="en-US"/>
+          </a:p>
+        </p:txBody>
+      </p:sp>
+      <p:sp>
+        <p:nvSpPr>
+          <p:cNvPr id="5" name="Rectangle 4"/>
+          <p:cNvSpPr/>
+          <p:nvPr/>
+        </p:nvSpPr>
+        <p:spPr>
+          <a:xfrm>
+            <a:off x="4955721" y="166953"/>
+            <a:ext cx="3020379" cy="369332"/>
+          </a:xfrm>
+          <a:prstGeom prst="rect">
+            <a:avLst/>
+          </a:prstGeom>
+        </p:spPr>
+        <p:txBody>
+          <a:bodyPr wrap="none">
+            <a:spAutoFit/>
+          </a:bodyPr>
+          <a:lstStyle/>
+          <a:p>
+            <a:r>
+              <a:rPr lang="en-US" dirty="0"/>
+              <a:t>Snapshot of the query output:</a:t>
+            </a:r>
+          </a:p>
+        </p:txBody>
+      </p:sp>
+      <p:sp>
+        <p:nvSpPr>
+          <p:cNvPr id="6" name="TextBox 5"/>
+          <p:cNvSpPr txBox="1"/>
+          <p:nvPr/>
+        </p:nvSpPr>
+        <p:spPr>
+          <a:xfrm>
+            <a:off x="119741" y="759278"/>
+            <a:ext cx="4631873" cy="1492431"/>
+          </a:xfrm>
+          <a:prstGeom prst="rect">
+            <a:avLst/>
+          </a:prstGeom>
+        </p:spPr>
+        <p:style>
+          <a:lnRef idx="2">
+            <a:schemeClr val="accent1"/>
+          </a:lnRef>
+          <a:fillRef idx="1">
+            <a:schemeClr val="lt1"/>
+          </a:fillRef>
+          <a:effectRef idx="0">
+            <a:schemeClr val="accent1"/>
+          </a:effectRef>
+          <a:fontRef idx="minor">
+            <a:schemeClr val="dk1"/>
+          </a:fontRef>
+        </p:style>
+        <p:txBody>
+          <a:bodyPr wrap="square" rtlCol="0">
+            <a:noAutofit/>
+          </a:bodyPr>
+          <a:lstStyle/>
+          <a:p>
+            <a:r>
+              <a:rPr lang="en-US" dirty="0"/>
+              <a:t>Description:</a:t>
+            </a:r>
+          </a:p>
+          <a:p>
+            <a:r>
+              <a:rPr lang="en-US" dirty="0"/>
+              <a:t>Retrieves each active subscriber's name alongside the product they purchased and the platform's commission split for that payment, giving finance a breakdown of revenue for premium-priced subscriptions.</a:t>
+            </a:r>
+          </a:p>
+          <a:p>
+            <a:endParaRPr lang="en-US" dirty="0"/>
+          </a:p>
+        </p:txBody>
+      </p:sp>
+    </p:spTree>
+    <p:extLst>
+      <p:ext uri="{BB962C8B-B14F-4D97-AF65-F5344CB8AC3E}">
+        <p14:creationId xmlns:p14="http://schemas.microsoft.com/office/powerpoint/2010/main" val="2841644932"/>
+      </p:ext>
+    </p:extLst>
+  </p:cSld>
+  <p:clrMapOvr>
+    <a:masterClrMapping/>
+  </p:clrMapOvr>
+</p:sld>
+</file>
+
+<file path=ppt/slides/slide24.xml><?xml version="1.0" encoding="utf-8"?>
+<p:sld xmlns:a="http://schemas.openxmlformats.org/drawingml/2006/main" xmlns:r="http://schemas.openxmlformats.org/officeDocument/2006/relationships" xmlns:p="http://schemas.openxmlformats.org/presentationml/2006/main">
+  <p:cSld>
+    <p:spTree>
+      <p:nvGrpSpPr>
+        <p:cNvPr id="1" name="">
+          <a:extLst>
+            <a:ext uri="{FF2B5EF4-FFF2-40B4-BE49-F238E27FC236}">
+              <a16:creationId xmlns:a16="http://schemas.microsoft.com/office/drawing/2014/main" id="{4E15BF77-9CFE-8CFA-C4D4-572940981296}"/>
+            </a:ext>
+          </a:extLst>
+        </p:cNvPr>
+        <p:cNvGrpSpPr/>
+        <p:nvPr/>
+      </p:nvGrpSpPr>
+      <p:grpSpPr>
+        <a:xfrm>
+          <a:off x="0" y="0"/>
+          <a:ext cx="0" cy="0"/>
+          <a:chOff x="0" y="0"/>
+          <a:chExt cx="0" cy="0"/>
+        </a:xfrm>
+      </p:grpSpPr>
+      <p:sp>
+        <p:nvSpPr>
+          <p:cNvPr id="2" name="Title 1">
+            <a:extLst>
+              <a:ext uri="{FF2B5EF4-FFF2-40B4-BE49-F238E27FC236}">
+                <a16:creationId xmlns:a16="http://schemas.microsoft.com/office/drawing/2014/main" id="{AD7C02E2-BF03-1309-FAE4-0924615917CF}"/>
+              </a:ext>
+            </a:extLst>
+          </p:cNvPr>
+          <p:cNvSpPr>
             <a:spLocks noGrp="1"/>
           </p:cNvSpPr>
           <p:nvPr>
-            <p:ph type="body" idx="1"/>
+            <p:ph type="title"/>
           </p:nvPr>
         </p:nvSpPr>
         <p:spPr>
           <a:xfrm>
-            <a:off x="838200" y="1825625"/>
-            <a:ext cx="10515600" cy="4351338"/>
+            <a:off x="176893" y="152854"/>
+            <a:ext cx="4313464" cy="443139"/>
+          </a:xfrm>
+        </p:spPr>
+        <p:txBody>
+          <a:bodyPr>
+            <a:noAutofit/>
+          </a:bodyPr>
+          <a:lstStyle/>
+          <a:p>
+            <a:r>
+              <a:rPr lang="en-US" sz="2400" dirty="0"/>
+              <a:t>QM9.2: LEFT-OUTER-JOIN-QUERY WITH WHERE CLAUSE</a:t>
+            </a:r>
+          </a:p>
+        </p:txBody>
+      </p:sp>
+      <p:sp>
+        <p:nvSpPr>
+          <p:cNvPr id="3" name="Content Placeholder 2">
+            <a:extLst>
+              <a:ext uri="{FF2B5EF4-FFF2-40B4-BE49-F238E27FC236}">
+                <a16:creationId xmlns:a16="http://schemas.microsoft.com/office/drawing/2014/main" id="{53301DA5-B75A-72D3-AB32-AFE681630316}"/>
+              </a:ext>
+            </a:extLst>
+          </p:cNvPr>
+          <p:cNvSpPr>
+            <a:spLocks noGrp="1"/>
+          </p:cNvSpPr>
+          <p:nvPr>
+            <p:ph idx="1"/>
+          </p:nvPr>
+        </p:nvSpPr>
+        <p:spPr>
+          <a:xfrm>
+            <a:off x="119741" y="2334985"/>
+            <a:ext cx="4631873" cy="4318907"/>
+          </a:xfrm>
+        </p:spPr>
+        <p:style>
+          <a:lnRef idx="2">
+            <a:schemeClr val="accent6"/>
+          </a:lnRef>
+          <a:fillRef idx="1">
+            <a:schemeClr val="lt1"/>
+          </a:fillRef>
+          <a:effectRef idx="0">
+            <a:schemeClr val="accent6"/>
+          </a:effectRef>
+          <a:fontRef idx="minor">
+            <a:schemeClr val="dk1"/>
+          </a:fontRef>
+        </p:style>
+        <p:txBody>
+          <a:bodyPr>
+            <a:normAutofit fontScale="92500" lnSpcReduction="20000"/>
+          </a:bodyPr>
+          <a:lstStyle/>
+          <a:p>
+            <a:r>
+              <a:rPr lang="en-US" dirty="0"/>
+              <a:t>SQL Query:</a:t>
+            </a:r>
+          </a:p>
+          <a:p>
+            <a:pPr marL="114300" indent="0">
+              <a:buNone/>
+            </a:pPr>
+            <a:r>
+              <a:rPr lang="en-US" dirty="0"/>
+              <a:t>SELECT </a:t>
+            </a:r>
+            <a:r>
+              <a:rPr lang="en-US" dirty="0" err="1"/>
+              <a:t>u.user_id</a:t>
+            </a:r>
+            <a:r>
+              <a:rPr lang="en-US" dirty="0"/>
+              <a:t>, </a:t>
+            </a:r>
+            <a:r>
+              <a:rPr lang="en-US" dirty="0" err="1"/>
+              <a:t>u.first_name</a:t>
+            </a:r>
+            <a:r>
+              <a:rPr lang="en-US" dirty="0"/>
+              <a:t>, </a:t>
+            </a:r>
+            <a:r>
+              <a:rPr lang="en-US" dirty="0" err="1"/>
+              <a:t>u.last_name</a:t>
+            </a:r>
+            <a:r>
+              <a:rPr lang="en-US" dirty="0"/>
+              <a:t>,</a:t>
+            </a:r>
+          </a:p>
+          <a:p>
+            <a:pPr marL="114300" indent="0">
+              <a:buNone/>
+            </a:pPr>
+            <a:r>
+              <a:rPr lang="en-US" dirty="0"/>
+              <a:t>       </a:t>
+            </a:r>
+            <a:r>
+              <a:rPr lang="en-US" dirty="0" err="1"/>
+              <a:t>sp.payout_id</a:t>
+            </a:r>
+            <a:r>
+              <a:rPr lang="en-US" dirty="0"/>
+              <a:t>, </a:t>
+            </a:r>
+            <a:r>
+              <a:rPr lang="en-US" dirty="0" err="1"/>
+              <a:t>sp.total_amount</a:t>
+            </a:r>
+            <a:r>
+              <a:rPr lang="en-US" dirty="0"/>
+              <a:t>, </a:t>
+            </a:r>
+            <a:r>
+              <a:rPr lang="en-US" dirty="0" err="1"/>
+              <a:t>sp.payout_status</a:t>
+            </a:r>
+            <a:endParaRPr lang="en-US" dirty="0"/>
+          </a:p>
+          <a:p>
+            <a:pPr marL="114300" indent="0">
+              <a:buNone/>
+            </a:pPr>
+            <a:r>
+              <a:rPr lang="en-US" dirty="0"/>
+              <a:t>FROM Users u</a:t>
+            </a:r>
+          </a:p>
+          <a:p>
+            <a:pPr marL="114300" indent="0">
+              <a:buNone/>
+            </a:pPr>
+            <a:r>
+              <a:rPr lang="en-US" dirty="0"/>
+              <a:t>LEFT OUTER JOIN </a:t>
+            </a:r>
+            <a:r>
+              <a:rPr lang="en-US" dirty="0" err="1"/>
+              <a:t>Seller_Payouts</a:t>
+            </a:r>
+            <a:r>
+              <a:rPr lang="en-US" dirty="0"/>
+              <a:t> </a:t>
+            </a:r>
+            <a:r>
+              <a:rPr lang="en-US" dirty="0" err="1"/>
+              <a:t>sp</a:t>
+            </a:r>
+            <a:r>
+              <a:rPr lang="en-US" dirty="0"/>
+              <a:t> ON </a:t>
+            </a:r>
+            <a:r>
+              <a:rPr lang="en-US" dirty="0" err="1"/>
+              <a:t>u.user_id</a:t>
+            </a:r>
+            <a:r>
+              <a:rPr lang="en-US" dirty="0"/>
+              <a:t> = </a:t>
+            </a:r>
+            <a:r>
+              <a:rPr lang="en-US" dirty="0" err="1"/>
+              <a:t>sp.seller_id</a:t>
+            </a:r>
+            <a:endParaRPr lang="en-US" dirty="0"/>
+          </a:p>
+          <a:p>
+            <a:pPr marL="114300" indent="0">
+              <a:buNone/>
+            </a:pPr>
+            <a:r>
+              <a:rPr lang="en-US" dirty="0"/>
+              <a:t>WHERE </a:t>
+            </a:r>
+            <a:r>
+              <a:rPr lang="en-US" dirty="0" err="1"/>
+              <a:t>u.role</a:t>
+            </a:r>
+            <a:r>
+              <a:rPr lang="en-US" dirty="0"/>
+              <a:t> = 'seller';</a:t>
+            </a:r>
+          </a:p>
+          <a:p>
+            <a:pPr marL="114300" indent="0">
+              <a:buNone/>
+            </a:pPr>
+            <a:endParaRPr lang="en-US" dirty="0"/>
+          </a:p>
+        </p:txBody>
+      </p:sp>
+      <p:sp>
+        <p:nvSpPr>
+          <p:cNvPr id="4" name="Rectangle 3">
+            <a:extLst>
+              <a:ext uri="{FF2B5EF4-FFF2-40B4-BE49-F238E27FC236}">
+                <a16:creationId xmlns:a16="http://schemas.microsoft.com/office/drawing/2014/main" id="{34BD1572-19F5-C61D-E713-D5B99423F120}"/>
+              </a:ext>
+            </a:extLst>
+          </p:cNvPr>
+          <p:cNvSpPr/>
+          <p:nvPr/>
+        </p:nvSpPr>
+        <p:spPr>
+          <a:xfrm>
+            <a:off x="4955721" y="536285"/>
+            <a:ext cx="7004958" cy="6109444"/>
           </a:xfrm>
           <a:prstGeom prst="rect">
             <a:avLst/>
           </a:prstGeom>
-          <a:noFill/>
-          <a:ln>
-            <a:noFill/>
-          </a:ln>
-        </p:spPr>
+        </p:spPr>
+        <p:style>
+          <a:lnRef idx="2">
+            <a:schemeClr val="accent4"/>
+          </a:lnRef>
+          <a:fillRef idx="1">
+            <a:schemeClr val="lt1"/>
+          </a:fillRef>
+          <a:effectRef idx="0">
+            <a:schemeClr val="accent4"/>
+          </a:effectRef>
+          <a:fontRef idx="minor">
+            <a:schemeClr val="dk1"/>
+          </a:fontRef>
+        </p:style>
         <p:txBody>
-          <a:bodyPr spcFirstLastPara="1" wrap="square" lIns="91425" tIns="45700" rIns="91425" bIns="45700" anchor="t" anchorCtr="0">
-            <a:normAutofit/>
+          <a:bodyPr rtlCol="0" anchor="ctr"/>
+          <a:lstStyle/>
+          <a:p>
+            <a:pPr algn="ctr"/>
+            <a:endParaRPr lang="en-US"/>
+          </a:p>
+        </p:txBody>
+      </p:sp>
+      <p:sp>
+        <p:nvSpPr>
+          <p:cNvPr id="5" name="Rectangle 4">
+            <a:extLst>
+              <a:ext uri="{FF2B5EF4-FFF2-40B4-BE49-F238E27FC236}">
+                <a16:creationId xmlns:a16="http://schemas.microsoft.com/office/drawing/2014/main" id="{C3854E9C-6877-19BB-D5A3-4EA031238022}"/>
+              </a:ext>
+            </a:extLst>
+          </p:cNvPr>
+          <p:cNvSpPr/>
+          <p:nvPr/>
+        </p:nvSpPr>
+        <p:spPr>
+          <a:xfrm>
+            <a:off x="4955721" y="166953"/>
+            <a:ext cx="3020379" cy="369332"/>
+          </a:xfrm>
+          <a:prstGeom prst="rect">
+            <a:avLst/>
+          </a:prstGeom>
+        </p:spPr>
+        <p:txBody>
+          <a:bodyPr wrap="none">
+            <a:spAutoFit/>
           </a:bodyPr>
           <a:lstStyle/>
           <a:p>
-            <a:pPr marL="0" lvl="0" indent="0" algn="l" rtl="0">
-              <a:lnSpc>
-                <a:spcPct val="100000"/>
-              </a:lnSpc>
-              <a:spcBef>
-                <a:spcPts val="1200"/>
-              </a:spcBef>
-              <a:spcAft>
-                <a:spcPts val="0"/>
-              </a:spcAft>
-              <a:buClr>
-                <a:schemeClr val="dk1"/>
-              </a:buClr>
-              <a:buSzPts val="1100"/>
-              <a:buNone/>
-            </a:pPr>
-            <a:r>
-              <a:rPr lang="en-US"/>
-              <a:t>- SQL Server 2022 Documentation</a:t>
-            </a:r>
-            <a:endParaRPr/>
-          </a:p>
-          <a:p>
-            <a:pPr marL="0" lvl="0" indent="0" algn="l" rtl="0">
-              <a:lnSpc>
-                <a:spcPct val="100000"/>
-              </a:lnSpc>
-              <a:spcBef>
-                <a:spcPts val="1200"/>
-              </a:spcBef>
-              <a:spcAft>
-                <a:spcPts val="0"/>
-              </a:spcAft>
-              <a:buClr>
-                <a:schemeClr val="dk1"/>
-              </a:buClr>
-              <a:buSzPts val="1100"/>
-              <a:buFont typeface="Arial"/>
-              <a:buNone/>
-            </a:pPr>
-            <a:r>
-              <a:rPr lang="en-US"/>
-              <a:t>https://learn.microsoft.com/en-us/sql/sql-server/</a:t>
-            </a:r>
-            <a:endParaRPr/>
-          </a:p>
-          <a:p>
-            <a:pPr marL="228600" lvl="0" indent="-50800" algn="l" rtl="0">
-              <a:lnSpc>
-                <a:spcPct val="90000"/>
-              </a:lnSpc>
-              <a:spcBef>
-                <a:spcPts val="1200"/>
-              </a:spcBef>
-              <a:spcAft>
-                <a:spcPts val="0"/>
-              </a:spcAft>
-              <a:buClr>
-                <a:schemeClr val="dk1"/>
-              </a:buClr>
-              <a:buSzPts val="2800"/>
-              <a:buNone/>
-            </a:pPr>
-            <a:endParaRPr/>
-          </a:p>
-          <a:p>
-            <a:pPr marL="228600" lvl="0" indent="-50800" algn="l" rtl="0">
-              <a:lnSpc>
-                <a:spcPct val="90000"/>
-              </a:lnSpc>
-              <a:spcBef>
-                <a:spcPts val="0"/>
-              </a:spcBef>
-              <a:spcAft>
-                <a:spcPts val="0"/>
-              </a:spcAft>
-              <a:buClr>
-                <a:schemeClr val="dk1"/>
-              </a:buClr>
-              <a:buSzPts val="2800"/>
-              <a:buNone/>
-            </a:pPr>
-            <a:endParaRPr/>
-          </a:p>
-          <a:p>
-            <a:pPr marL="0" lvl="0" indent="0" algn="l" rtl="0">
-              <a:lnSpc>
-                <a:spcPct val="90000"/>
-              </a:lnSpc>
-              <a:spcBef>
-                <a:spcPts val="0"/>
-              </a:spcBef>
-              <a:spcAft>
-                <a:spcPts val="0"/>
-              </a:spcAft>
-              <a:buClr>
-                <a:schemeClr val="dk1"/>
-              </a:buClr>
-              <a:buSzPts val="2800"/>
-              <a:buNone/>
-            </a:pPr>
-            <a:endParaRPr/>
+            <a:r>
+              <a:rPr lang="en-US" dirty="0"/>
+              <a:t>Snapshot of the query output:</a:t>
+            </a:r>
+          </a:p>
+        </p:txBody>
+      </p:sp>
+      <p:sp>
+        <p:nvSpPr>
+          <p:cNvPr id="6" name="TextBox 5">
+            <a:extLst>
+              <a:ext uri="{FF2B5EF4-FFF2-40B4-BE49-F238E27FC236}">
+                <a16:creationId xmlns:a16="http://schemas.microsoft.com/office/drawing/2014/main" id="{F8E981AC-C887-6A80-4864-57DACEAA0BF8}"/>
+              </a:ext>
+            </a:extLst>
+          </p:cNvPr>
+          <p:cNvSpPr txBox="1"/>
+          <p:nvPr/>
+        </p:nvSpPr>
+        <p:spPr>
+          <a:xfrm>
+            <a:off x="119741" y="759278"/>
+            <a:ext cx="4631873" cy="1492431"/>
+          </a:xfrm>
+          <a:prstGeom prst="rect">
+            <a:avLst/>
+          </a:prstGeom>
+        </p:spPr>
+        <p:style>
+          <a:lnRef idx="2">
+            <a:schemeClr val="accent1"/>
+          </a:lnRef>
+          <a:fillRef idx="1">
+            <a:schemeClr val="lt1"/>
+          </a:fillRef>
+          <a:effectRef idx="0">
+            <a:schemeClr val="accent1"/>
+          </a:effectRef>
+          <a:fontRef idx="minor">
+            <a:schemeClr val="dk1"/>
+          </a:fontRef>
+        </p:style>
+        <p:txBody>
+          <a:bodyPr wrap="square" rtlCol="0">
+            <a:noAutofit/>
+          </a:bodyPr>
+          <a:lstStyle/>
+          <a:p>
+            <a:r>
+              <a:rPr lang="en-US" dirty="0"/>
+              <a:t>Description:</a:t>
+            </a:r>
+          </a:p>
+          <a:p>
+            <a:r>
+              <a:rPr lang="en-US" dirty="0"/>
+              <a:t>Lists every seller account together with their payout record so the platform can audit which sellers have never received a payout; sellers with no matching payout row appear with NULL in all payout columns.</a:t>
+            </a:r>
+          </a:p>
+          <a:p>
+            <a:endParaRPr lang="en-US" dirty="0"/>
           </a:p>
         </p:txBody>
       </p:sp>
     </p:spTree>
+    <p:extLst>
+      <p:ext uri="{BB962C8B-B14F-4D97-AF65-F5344CB8AC3E}">
+        <p14:creationId xmlns:p14="http://schemas.microsoft.com/office/powerpoint/2010/main" val="2716028521"/>
+      </p:ext>
+    </p:extLst>
+  </p:cSld>
+  <p:clrMapOvr>
+    <a:masterClrMapping/>
+  </p:clrMapOvr>
+</p:sld>
+</file>
+
+<file path=ppt/slides/slide25.xml><?xml version="1.0" encoding="utf-8"?>
+<p:sld xmlns:a="http://schemas.openxmlformats.org/drawingml/2006/main" xmlns:r="http://schemas.openxmlformats.org/officeDocument/2006/relationships" xmlns:p="http://schemas.openxmlformats.org/presentationml/2006/main">
+  <p:cSld>
+    <p:spTree>
+      <p:nvGrpSpPr>
+        <p:cNvPr id="1" name="">
+          <a:extLst>
+            <a:ext uri="{FF2B5EF4-FFF2-40B4-BE49-F238E27FC236}">
+              <a16:creationId xmlns:a16="http://schemas.microsoft.com/office/drawing/2014/main" id="{433BC2D0-2CD3-4623-15B3-8AF4A43FCEA5}"/>
+            </a:ext>
+          </a:extLst>
+        </p:cNvPr>
+        <p:cNvGrpSpPr/>
+        <p:nvPr/>
+      </p:nvGrpSpPr>
+      <p:grpSpPr>
+        <a:xfrm>
+          <a:off x="0" y="0"/>
+          <a:ext cx="0" cy="0"/>
+          <a:chOff x="0" y="0"/>
+          <a:chExt cx="0" cy="0"/>
+        </a:xfrm>
+      </p:grpSpPr>
+      <p:sp>
+        <p:nvSpPr>
+          <p:cNvPr id="2" name="Title 1">
+            <a:extLst>
+              <a:ext uri="{FF2B5EF4-FFF2-40B4-BE49-F238E27FC236}">
+                <a16:creationId xmlns:a16="http://schemas.microsoft.com/office/drawing/2014/main" id="{E330B63A-EDCB-DBBE-6F1D-DD7F20F25CDF}"/>
+              </a:ext>
+            </a:extLst>
+          </p:cNvPr>
+          <p:cNvSpPr>
+            <a:spLocks noGrp="1"/>
+          </p:cNvSpPr>
+          <p:nvPr>
+            <p:ph type="title"/>
+          </p:nvPr>
+        </p:nvSpPr>
+        <p:spPr>
+          <a:xfrm>
+            <a:off x="176893" y="152854"/>
+            <a:ext cx="4313464" cy="443139"/>
+          </a:xfrm>
+        </p:spPr>
+        <p:txBody>
+          <a:bodyPr>
+            <a:noAutofit/>
+          </a:bodyPr>
+          <a:lstStyle/>
+          <a:p>
+            <a:r>
+              <a:rPr lang="en-US" sz="2400" dirty="0"/>
+              <a:t>QM9.3: RIGHT-OUTER-JOIN-QUERY WITH WHERE CLAUSE</a:t>
+            </a:r>
+          </a:p>
+        </p:txBody>
+      </p:sp>
+      <p:sp>
+        <p:nvSpPr>
+          <p:cNvPr id="3" name="Content Placeholder 2">
+            <a:extLst>
+              <a:ext uri="{FF2B5EF4-FFF2-40B4-BE49-F238E27FC236}">
+                <a16:creationId xmlns:a16="http://schemas.microsoft.com/office/drawing/2014/main" id="{869B5E88-BD9D-C451-7761-2A253F5117F3}"/>
+              </a:ext>
+            </a:extLst>
+          </p:cNvPr>
+          <p:cNvSpPr>
+            <a:spLocks noGrp="1"/>
+          </p:cNvSpPr>
+          <p:nvPr>
+            <p:ph idx="1"/>
+          </p:nvPr>
+        </p:nvSpPr>
+        <p:spPr>
+          <a:xfrm>
+            <a:off x="119741" y="2334985"/>
+            <a:ext cx="4631873" cy="4318907"/>
+          </a:xfrm>
+        </p:spPr>
+        <p:style>
+          <a:lnRef idx="2">
+            <a:schemeClr val="accent6"/>
+          </a:lnRef>
+          <a:fillRef idx="1">
+            <a:schemeClr val="lt1"/>
+          </a:fillRef>
+          <a:effectRef idx="0">
+            <a:schemeClr val="accent6"/>
+          </a:effectRef>
+          <a:fontRef idx="minor">
+            <a:schemeClr val="dk1"/>
+          </a:fontRef>
+        </p:style>
+        <p:txBody>
+          <a:bodyPr>
+            <a:normAutofit lnSpcReduction="10000"/>
+          </a:bodyPr>
+          <a:lstStyle/>
+          <a:p>
+            <a:r>
+              <a:rPr lang="en-US" dirty="0"/>
+              <a:t>SQL Query:</a:t>
+            </a:r>
+          </a:p>
+          <a:p>
+            <a:pPr marL="114300" indent="0">
+              <a:buNone/>
+            </a:pPr>
+            <a:r>
+              <a:rPr lang="en-US" dirty="0"/>
+              <a:t>SELECT </a:t>
+            </a:r>
+            <a:r>
+              <a:rPr lang="en-US" dirty="0" err="1"/>
+              <a:t>r.review_id</a:t>
+            </a:r>
+            <a:r>
+              <a:rPr lang="en-US" dirty="0"/>
+              <a:t>, </a:t>
+            </a:r>
+            <a:r>
+              <a:rPr lang="en-US" dirty="0" err="1"/>
+              <a:t>r.rating</a:t>
+            </a:r>
+            <a:r>
+              <a:rPr lang="en-US" dirty="0"/>
+              <a:t>, </a:t>
+            </a:r>
+            <a:r>
+              <a:rPr lang="en-US" dirty="0" err="1"/>
+              <a:t>r.comment</a:t>
+            </a:r>
+            <a:r>
+              <a:rPr lang="en-US" dirty="0"/>
+              <a:t>,</a:t>
+            </a:r>
+          </a:p>
+          <a:p>
+            <a:pPr marL="114300" indent="0">
+              <a:buNone/>
+            </a:pPr>
+            <a:r>
+              <a:rPr lang="en-US" dirty="0"/>
+              <a:t>       </a:t>
+            </a:r>
+            <a:r>
+              <a:rPr lang="en-US" dirty="0" err="1"/>
+              <a:t>p.product_id</a:t>
+            </a:r>
+            <a:r>
+              <a:rPr lang="en-US" dirty="0"/>
+              <a:t>, </a:t>
+            </a:r>
+            <a:r>
+              <a:rPr lang="en-US" dirty="0" err="1"/>
+              <a:t>p.product_name</a:t>
+            </a:r>
+            <a:r>
+              <a:rPr lang="en-US" dirty="0"/>
+              <a:t>, </a:t>
+            </a:r>
+            <a:r>
+              <a:rPr lang="en-US" dirty="0" err="1"/>
+              <a:t>p.price</a:t>
+            </a:r>
+            <a:endParaRPr lang="en-US" dirty="0"/>
+          </a:p>
+          <a:p>
+            <a:pPr marL="114300" indent="0">
+              <a:buNone/>
+            </a:pPr>
+            <a:r>
+              <a:rPr lang="en-US" dirty="0"/>
+              <a:t>FROM Reviews r</a:t>
+            </a:r>
+          </a:p>
+          <a:p>
+            <a:pPr marL="114300" indent="0">
+              <a:buNone/>
+            </a:pPr>
+            <a:r>
+              <a:rPr lang="en-US" dirty="0"/>
+              <a:t>RIGHT OUTER JOIN Products p ON </a:t>
+            </a:r>
+            <a:r>
+              <a:rPr lang="en-US" dirty="0" err="1"/>
+              <a:t>r.product_id</a:t>
+            </a:r>
+            <a:r>
+              <a:rPr lang="en-US" dirty="0"/>
+              <a:t> = </a:t>
+            </a:r>
+            <a:r>
+              <a:rPr lang="en-US" dirty="0" err="1"/>
+              <a:t>p.product_id</a:t>
+            </a:r>
+            <a:endParaRPr lang="en-US" dirty="0"/>
+          </a:p>
+          <a:p>
+            <a:pPr marL="114300" indent="0">
+              <a:buNone/>
+            </a:pPr>
+            <a:r>
+              <a:rPr lang="en-US" dirty="0"/>
+              <a:t>WHERE </a:t>
+            </a:r>
+            <a:r>
+              <a:rPr lang="en-US" dirty="0" err="1"/>
+              <a:t>p.status</a:t>
+            </a:r>
+            <a:r>
+              <a:rPr lang="en-US" dirty="0"/>
+              <a:t> = 'active';</a:t>
+            </a:r>
+          </a:p>
+          <a:p>
+            <a:pPr marL="114300" indent="0">
+              <a:buNone/>
+            </a:pPr>
+            <a:endParaRPr lang="en-US" dirty="0"/>
+          </a:p>
+        </p:txBody>
+      </p:sp>
+      <p:sp>
+        <p:nvSpPr>
+          <p:cNvPr id="4" name="Rectangle 3">
+            <a:extLst>
+              <a:ext uri="{FF2B5EF4-FFF2-40B4-BE49-F238E27FC236}">
+                <a16:creationId xmlns:a16="http://schemas.microsoft.com/office/drawing/2014/main" id="{FF6519E4-F081-DBF1-C0A2-5EA5E1E84A2B}"/>
+              </a:ext>
+            </a:extLst>
+          </p:cNvPr>
+          <p:cNvSpPr/>
+          <p:nvPr/>
+        </p:nvSpPr>
+        <p:spPr>
+          <a:xfrm>
+            <a:off x="4955721" y="536285"/>
+            <a:ext cx="7004958" cy="6109444"/>
+          </a:xfrm>
+          <a:prstGeom prst="rect">
+            <a:avLst/>
+          </a:prstGeom>
+        </p:spPr>
+        <p:style>
+          <a:lnRef idx="2">
+            <a:schemeClr val="accent4"/>
+          </a:lnRef>
+          <a:fillRef idx="1">
+            <a:schemeClr val="lt1"/>
+          </a:fillRef>
+          <a:effectRef idx="0">
+            <a:schemeClr val="accent4"/>
+          </a:effectRef>
+          <a:fontRef idx="minor">
+            <a:schemeClr val="dk1"/>
+          </a:fontRef>
+        </p:style>
+        <p:txBody>
+          <a:bodyPr rtlCol="0" anchor="ctr"/>
+          <a:lstStyle/>
+          <a:p>
+            <a:pPr algn="ctr"/>
+            <a:endParaRPr lang="en-US"/>
+          </a:p>
+        </p:txBody>
+      </p:sp>
+      <p:sp>
+        <p:nvSpPr>
+          <p:cNvPr id="5" name="Rectangle 4">
+            <a:extLst>
+              <a:ext uri="{FF2B5EF4-FFF2-40B4-BE49-F238E27FC236}">
+                <a16:creationId xmlns:a16="http://schemas.microsoft.com/office/drawing/2014/main" id="{95E859D5-34F5-C684-E702-2CA552D9671C}"/>
+              </a:ext>
+            </a:extLst>
+          </p:cNvPr>
+          <p:cNvSpPr/>
+          <p:nvPr/>
+        </p:nvSpPr>
+        <p:spPr>
+          <a:xfrm>
+            <a:off x="4955721" y="166953"/>
+            <a:ext cx="3020379" cy="369332"/>
+          </a:xfrm>
+          <a:prstGeom prst="rect">
+            <a:avLst/>
+          </a:prstGeom>
+        </p:spPr>
+        <p:txBody>
+          <a:bodyPr wrap="none">
+            <a:spAutoFit/>
+          </a:bodyPr>
+          <a:lstStyle/>
+          <a:p>
+            <a:r>
+              <a:rPr lang="en-US" dirty="0"/>
+              <a:t>Snapshot of the query output:</a:t>
+            </a:r>
+          </a:p>
+        </p:txBody>
+      </p:sp>
+      <p:sp>
+        <p:nvSpPr>
+          <p:cNvPr id="6" name="TextBox 5">
+            <a:extLst>
+              <a:ext uri="{FF2B5EF4-FFF2-40B4-BE49-F238E27FC236}">
+                <a16:creationId xmlns:a16="http://schemas.microsoft.com/office/drawing/2014/main" id="{095920E0-14CB-4EFC-49E9-9569998C4A46}"/>
+              </a:ext>
+            </a:extLst>
+          </p:cNvPr>
+          <p:cNvSpPr txBox="1"/>
+          <p:nvPr/>
+        </p:nvSpPr>
+        <p:spPr>
+          <a:xfrm>
+            <a:off x="119741" y="759278"/>
+            <a:ext cx="4631873" cy="1492431"/>
+          </a:xfrm>
+          <a:prstGeom prst="rect">
+            <a:avLst/>
+          </a:prstGeom>
+        </p:spPr>
+        <p:style>
+          <a:lnRef idx="2">
+            <a:schemeClr val="accent1"/>
+          </a:lnRef>
+          <a:fillRef idx="1">
+            <a:schemeClr val="lt1"/>
+          </a:fillRef>
+          <a:effectRef idx="0">
+            <a:schemeClr val="accent1"/>
+          </a:effectRef>
+          <a:fontRef idx="minor">
+            <a:schemeClr val="dk1"/>
+          </a:fontRef>
+        </p:style>
+        <p:txBody>
+          <a:bodyPr wrap="square" rtlCol="0">
+            <a:noAutofit/>
+          </a:bodyPr>
+          <a:lstStyle/>
+          <a:p>
+            <a:r>
+              <a:rPr lang="en-US" dirty="0"/>
+              <a:t>Description:</a:t>
+            </a:r>
+          </a:p>
+          <a:p>
+            <a:r>
+              <a:rPr lang="en-US" dirty="0"/>
+              <a:t>Displays all active products alongside any reviews they have received so the platform can identify listings with no reviews; products with no reviews appear with NULL in all review columns.</a:t>
+            </a:r>
+          </a:p>
+          <a:p>
+            <a:endParaRPr lang="en-US" dirty="0"/>
+          </a:p>
+        </p:txBody>
+      </p:sp>
+    </p:spTree>
+    <p:extLst>
+      <p:ext uri="{BB962C8B-B14F-4D97-AF65-F5344CB8AC3E}">
+        <p14:creationId xmlns:p14="http://schemas.microsoft.com/office/powerpoint/2010/main" val="122700673"/>
+      </p:ext>
+    </p:extLst>
+  </p:cSld>
+  <p:clrMapOvr>
+    <a:masterClrMapping/>
+  </p:clrMapOvr>
+</p:sld>
+</file>
+
+<file path=ppt/slides/slide26.xml><?xml version="1.0" encoding="utf-8"?>
+<p:sld xmlns:a="http://schemas.openxmlformats.org/drawingml/2006/main" xmlns:r="http://schemas.openxmlformats.org/officeDocument/2006/relationships" xmlns:p="http://schemas.openxmlformats.org/presentationml/2006/main">
+  <p:cSld>
+    <p:spTree>
+      <p:nvGrpSpPr>
+        <p:cNvPr id="1" name="">
+          <a:extLst>
+            <a:ext uri="{FF2B5EF4-FFF2-40B4-BE49-F238E27FC236}">
+              <a16:creationId xmlns:a16="http://schemas.microsoft.com/office/drawing/2014/main" id="{AA729BB4-5A62-71EE-F3C9-5FBA0DFD2BEA}"/>
+            </a:ext>
+          </a:extLst>
+        </p:cNvPr>
+        <p:cNvGrpSpPr/>
+        <p:nvPr/>
+      </p:nvGrpSpPr>
+      <p:grpSpPr>
+        <a:xfrm>
+          <a:off x="0" y="0"/>
+          <a:ext cx="0" cy="0"/>
+          <a:chOff x="0" y="0"/>
+          <a:chExt cx="0" cy="0"/>
+        </a:xfrm>
+      </p:grpSpPr>
+      <p:sp>
+        <p:nvSpPr>
+          <p:cNvPr id="2" name="Title 1">
+            <a:extLst>
+              <a:ext uri="{FF2B5EF4-FFF2-40B4-BE49-F238E27FC236}">
+                <a16:creationId xmlns:a16="http://schemas.microsoft.com/office/drawing/2014/main" id="{C39917F7-C837-03E0-7283-818249E2470C}"/>
+              </a:ext>
+            </a:extLst>
+          </p:cNvPr>
+          <p:cNvSpPr>
+            <a:spLocks noGrp="1"/>
+          </p:cNvSpPr>
+          <p:nvPr>
+            <p:ph type="title"/>
+          </p:nvPr>
+        </p:nvSpPr>
+        <p:spPr>
+          <a:xfrm>
+            <a:off x="176893" y="152854"/>
+            <a:ext cx="4313464" cy="443139"/>
+          </a:xfrm>
+        </p:spPr>
+        <p:txBody>
+          <a:bodyPr>
+            <a:noAutofit/>
+          </a:bodyPr>
+          <a:lstStyle/>
+          <a:p>
+            <a:r>
+              <a:rPr lang="en-US" sz="2400" dirty="0"/>
+              <a:t>QM9.4: FULL-OUTER-JOIN-QUERY WITH WHERE CLAUSE</a:t>
+            </a:r>
+          </a:p>
+        </p:txBody>
+      </p:sp>
+      <p:sp>
+        <p:nvSpPr>
+          <p:cNvPr id="3" name="Content Placeholder 2">
+            <a:extLst>
+              <a:ext uri="{FF2B5EF4-FFF2-40B4-BE49-F238E27FC236}">
+                <a16:creationId xmlns:a16="http://schemas.microsoft.com/office/drawing/2014/main" id="{F50EBD2F-2B5E-07E5-893E-81F4E5557599}"/>
+              </a:ext>
+            </a:extLst>
+          </p:cNvPr>
+          <p:cNvSpPr>
+            <a:spLocks noGrp="1"/>
+          </p:cNvSpPr>
+          <p:nvPr>
+            <p:ph idx="1"/>
+          </p:nvPr>
+        </p:nvSpPr>
+        <p:spPr>
+          <a:xfrm>
+            <a:off x="119741" y="2334985"/>
+            <a:ext cx="4631873" cy="4318907"/>
+          </a:xfrm>
+        </p:spPr>
+        <p:style>
+          <a:lnRef idx="2">
+            <a:schemeClr val="accent6"/>
+          </a:lnRef>
+          <a:fillRef idx="1">
+            <a:schemeClr val="lt1"/>
+          </a:fillRef>
+          <a:effectRef idx="0">
+            <a:schemeClr val="accent6"/>
+          </a:effectRef>
+          <a:fontRef idx="minor">
+            <a:schemeClr val="dk1"/>
+          </a:fontRef>
+        </p:style>
+        <p:txBody>
+          <a:bodyPr>
+            <a:normAutofit fontScale="92500" lnSpcReduction="20000"/>
+          </a:bodyPr>
+          <a:lstStyle/>
+          <a:p>
+            <a:r>
+              <a:rPr lang="en-US" dirty="0"/>
+              <a:t>SQL Query:</a:t>
+            </a:r>
+          </a:p>
+          <a:p>
+            <a:pPr marL="114300" indent="0">
+              <a:buNone/>
+            </a:pPr>
+            <a:r>
+              <a:rPr lang="en-US" dirty="0"/>
+              <a:t>SELECT </a:t>
+            </a:r>
+            <a:r>
+              <a:rPr lang="en-US" dirty="0" err="1"/>
+              <a:t>r.review_id</a:t>
+            </a:r>
+            <a:r>
+              <a:rPr lang="en-US" dirty="0"/>
+              <a:t>, </a:t>
+            </a:r>
+            <a:r>
+              <a:rPr lang="en-US" dirty="0" err="1"/>
+              <a:t>r.buyer_id</a:t>
+            </a:r>
+            <a:r>
+              <a:rPr lang="en-US" dirty="0"/>
+              <a:t>, </a:t>
+            </a:r>
+            <a:r>
+              <a:rPr lang="en-US" dirty="0" err="1"/>
+              <a:t>r.rating</a:t>
+            </a:r>
+            <a:r>
+              <a:rPr lang="en-US" dirty="0"/>
+              <a:t>,</a:t>
+            </a:r>
+          </a:p>
+          <a:p>
+            <a:pPr marL="114300" indent="0">
+              <a:buNone/>
+            </a:pPr>
+            <a:r>
+              <a:rPr lang="en-US" dirty="0" err="1"/>
+              <a:t>sp.payout_id</a:t>
+            </a:r>
+            <a:r>
+              <a:rPr lang="en-US" dirty="0"/>
+              <a:t>, </a:t>
+            </a:r>
+            <a:r>
+              <a:rPr lang="en-US" dirty="0" err="1"/>
+              <a:t>sp.seller_id</a:t>
+            </a:r>
+            <a:r>
+              <a:rPr lang="en-US" dirty="0"/>
+              <a:t>, </a:t>
+            </a:r>
+            <a:r>
+              <a:rPr lang="en-US" dirty="0" err="1"/>
+              <a:t>sp.total_amount</a:t>
+            </a:r>
+            <a:endParaRPr lang="en-US" dirty="0"/>
+          </a:p>
+          <a:p>
+            <a:pPr marL="114300" indent="0">
+              <a:buNone/>
+            </a:pPr>
+            <a:r>
+              <a:rPr lang="en-US" dirty="0"/>
+              <a:t>FROM Reviews r</a:t>
+            </a:r>
+          </a:p>
+          <a:p>
+            <a:pPr marL="114300" indent="0">
+              <a:buNone/>
+            </a:pPr>
+            <a:r>
+              <a:rPr lang="en-US" dirty="0"/>
+              <a:t>FULL OUTER JOIN </a:t>
+            </a:r>
+            <a:r>
+              <a:rPr lang="en-US" dirty="0" err="1"/>
+              <a:t>Seller_Payouts</a:t>
+            </a:r>
+            <a:r>
+              <a:rPr lang="en-US" dirty="0"/>
+              <a:t> </a:t>
+            </a:r>
+            <a:r>
+              <a:rPr lang="en-US" dirty="0" err="1"/>
+              <a:t>sp</a:t>
+            </a:r>
+            <a:r>
+              <a:rPr lang="en-US" dirty="0"/>
+              <a:t> ON </a:t>
+            </a:r>
+            <a:r>
+              <a:rPr lang="en-US" dirty="0" err="1"/>
+              <a:t>r.buyer_id</a:t>
+            </a:r>
+            <a:r>
+              <a:rPr lang="en-US" dirty="0"/>
+              <a:t> = </a:t>
+            </a:r>
+            <a:r>
+              <a:rPr lang="en-US" dirty="0" err="1"/>
+              <a:t>sp.seller_id</a:t>
+            </a:r>
+            <a:endParaRPr lang="en-US" dirty="0"/>
+          </a:p>
+          <a:p>
+            <a:pPr marL="114300" indent="0">
+              <a:buNone/>
+            </a:pPr>
+            <a:r>
+              <a:rPr lang="en-US" dirty="0"/>
+              <a:t>WHERE </a:t>
+            </a:r>
+            <a:r>
+              <a:rPr lang="en-US" dirty="0" err="1"/>
+              <a:t>r.review_id</a:t>
+            </a:r>
+            <a:r>
+              <a:rPr lang="en-US" dirty="0"/>
+              <a:t> IS NOT NULL OR </a:t>
+            </a:r>
+            <a:r>
+              <a:rPr lang="en-US" dirty="0" err="1"/>
+              <a:t>sp.payout_id</a:t>
+            </a:r>
+            <a:r>
+              <a:rPr lang="en-US" dirty="0"/>
+              <a:t> IS NOT NULL;</a:t>
+            </a:r>
+          </a:p>
+        </p:txBody>
+      </p:sp>
+      <p:sp>
+        <p:nvSpPr>
+          <p:cNvPr id="4" name="Rectangle 3">
+            <a:extLst>
+              <a:ext uri="{FF2B5EF4-FFF2-40B4-BE49-F238E27FC236}">
+                <a16:creationId xmlns:a16="http://schemas.microsoft.com/office/drawing/2014/main" id="{2E19587D-5C22-3083-5DA8-2ADD312F7BCA}"/>
+              </a:ext>
+            </a:extLst>
+          </p:cNvPr>
+          <p:cNvSpPr/>
+          <p:nvPr/>
+        </p:nvSpPr>
+        <p:spPr>
+          <a:xfrm>
+            <a:off x="4955721" y="536285"/>
+            <a:ext cx="7004958" cy="6109444"/>
+          </a:xfrm>
+          <a:prstGeom prst="rect">
+            <a:avLst/>
+          </a:prstGeom>
+        </p:spPr>
+        <p:style>
+          <a:lnRef idx="2">
+            <a:schemeClr val="accent4"/>
+          </a:lnRef>
+          <a:fillRef idx="1">
+            <a:schemeClr val="lt1"/>
+          </a:fillRef>
+          <a:effectRef idx="0">
+            <a:schemeClr val="accent4"/>
+          </a:effectRef>
+          <a:fontRef idx="minor">
+            <a:schemeClr val="dk1"/>
+          </a:fontRef>
+        </p:style>
+        <p:txBody>
+          <a:bodyPr rtlCol="0" anchor="ctr"/>
+          <a:lstStyle/>
+          <a:p>
+            <a:pPr algn="ctr"/>
+            <a:endParaRPr lang="en-US"/>
+          </a:p>
+        </p:txBody>
+      </p:sp>
+      <p:sp>
+        <p:nvSpPr>
+          <p:cNvPr id="5" name="Rectangle 4">
+            <a:extLst>
+              <a:ext uri="{FF2B5EF4-FFF2-40B4-BE49-F238E27FC236}">
+                <a16:creationId xmlns:a16="http://schemas.microsoft.com/office/drawing/2014/main" id="{F4434E0D-03C4-0680-9831-D5B0DBE86874}"/>
+              </a:ext>
+            </a:extLst>
+          </p:cNvPr>
+          <p:cNvSpPr/>
+          <p:nvPr/>
+        </p:nvSpPr>
+        <p:spPr>
+          <a:xfrm>
+            <a:off x="4955721" y="166953"/>
+            <a:ext cx="3020379" cy="369332"/>
+          </a:xfrm>
+          <a:prstGeom prst="rect">
+            <a:avLst/>
+          </a:prstGeom>
+        </p:spPr>
+        <p:txBody>
+          <a:bodyPr wrap="none">
+            <a:spAutoFit/>
+          </a:bodyPr>
+          <a:lstStyle/>
+          <a:p>
+            <a:r>
+              <a:rPr lang="en-US" dirty="0"/>
+              <a:t>Snapshot of the query output:</a:t>
+            </a:r>
+          </a:p>
+        </p:txBody>
+      </p:sp>
+      <p:sp>
+        <p:nvSpPr>
+          <p:cNvPr id="6" name="TextBox 5">
+            <a:extLst>
+              <a:ext uri="{FF2B5EF4-FFF2-40B4-BE49-F238E27FC236}">
+                <a16:creationId xmlns:a16="http://schemas.microsoft.com/office/drawing/2014/main" id="{3FEE7426-95F5-0982-CBD0-B1182FBB51F1}"/>
+              </a:ext>
+            </a:extLst>
+          </p:cNvPr>
+          <p:cNvSpPr txBox="1"/>
+          <p:nvPr/>
+        </p:nvSpPr>
+        <p:spPr>
+          <a:xfrm>
+            <a:off x="119741" y="759278"/>
+            <a:ext cx="4631873" cy="1492431"/>
+          </a:xfrm>
+          <a:prstGeom prst="rect">
+            <a:avLst/>
+          </a:prstGeom>
+        </p:spPr>
+        <p:style>
+          <a:lnRef idx="2">
+            <a:schemeClr val="accent1"/>
+          </a:lnRef>
+          <a:fillRef idx="1">
+            <a:schemeClr val="lt1"/>
+          </a:fillRef>
+          <a:effectRef idx="0">
+            <a:schemeClr val="accent1"/>
+          </a:effectRef>
+          <a:fontRef idx="minor">
+            <a:schemeClr val="dk1"/>
+          </a:fontRef>
+        </p:style>
+        <p:txBody>
+          <a:bodyPr wrap="square" rtlCol="0">
+            <a:noAutofit/>
+          </a:bodyPr>
+          <a:lstStyle/>
+          <a:p>
+            <a:r>
+              <a:rPr lang="en-US" dirty="0"/>
+              <a:t>Description:</a:t>
+            </a:r>
+          </a:p>
+          <a:p>
+            <a:r>
+              <a:rPr lang="en-US" dirty="0"/>
+              <a:t>Compares buyer review activity against seller payout records to confirm that no single account is simultaneously earning payouts and submitting reviews, ensuring role integrity across all platform users.</a:t>
+            </a:r>
+          </a:p>
+          <a:p>
+            <a:endParaRPr lang="en-US" dirty="0"/>
+          </a:p>
+        </p:txBody>
+      </p:sp>
+    </p:spTree>
+    <p:extLst>
+      <p:ext uri="{BB962C8B-B14F-4D97-AF65-F5344CB8AC3E}">
+        <p14:creationId xmlns:p14="http://schemas.microsoft.com/office/powerpoint/2010/main" val="1142143256"/>
+      </p:ext>
+    </p:extLst>
+  </p:cSld>
+  <p:clrMapOvr>
+    <a:masterClrMapping/>
+  </p:clrMapOvr>
+</p:sld>
+</file>
+
+<file path=ppt/slides/slide27.xml><?xml version="1.0" encoding="utf-8"?>
+<p:sld xmlns:a="http://schemas.openxmlformats.org/drawingml/2006/main" xmlns:r="http://schemas.openxmlformats.org/officeDocument/2006/relationships" xmlns:p="http://schemas.openxmlformats.org/presentationml/2006/main">
+  <p:cSld>
+    <p:spTree>
+      <p:nvGrpSpPr>
+        <p:cNvPr id="1" name="">
+          <a:extLst>
+            <a:ext uri="{FF2B5EF4-FFF2-40B4-BE49-F238E27FC236}">
+              <a16:creationId xmlns:a16="http://schemas.microsoft.com/office/drawing/2014/main" id="{62CBD988-C203-E77A-0213-54007CA9FCCA}"/>
+            </a:ext>
+          </a:extLst>
+        </p:cNvPr>
+        <p:cNvGrpSpPr/>
+        <p:nvPr/>
+      </p:nvGrpSpPr>
+      <p:grpSpPr>
+        <a:xfrm>
+          <a:off x="0" y="0"/>
+          <a:ext cx="0" cy="0"/>
+          <a:chOff x="0" y="0"/>
+          <a:chExt cx="0" cy="0"/>
+        </a:xfrm>
+      </p:grpSpPr>
+      <p:sp>
+        <p:nvSpPr>
+          <p:cNvPr id="2" name="Title 1">
+            <a:extLst>
+              <a:ext uri="{FF2B5EF4-FFF2-40B4-BE49-F238E27FC236}">
+                <a16:creationId xmlns:a16="http://schemas.microsoft.com/office/drawing/2014/main" id="{E9A94E80-3C55-F5AB-43EE-BD5A4C3E5E44}"/>
+              </a:ext>
+            </a:extLst>
+          </p:cNvPr>
+          <p:cNvSpPr>
+            <a:spLocks noGrp="1"/>
+          </p:cNvSpPr>
+          <p:nvPr>
+            <p:ph type="title"/>
+          </p:nvPr>
+        </p:nvSpPr>
+        <p:spPr>
+          <a:xfrm>
+            <a:off x="176892" y="152854"/>
+            <a:ext cx="4574721" cy="443139"/>
+          </a:xfrm>
+        </p:spPr>
+        <p:txBody>
+          <a:bodyPr>
+            <a:noAutofit/>
+          </a:bodyPr>
+          <a:lstStyle/>
+          <a:p>
+            <a:r>
+              <a:rPr lang="en-US" sz="2400" dirty="0"/>
+              <a:t>QM10.1: AGGREGATION-JOIN-QUERY WITH GROUP BY &amp; HAVING</a:t>
+            </a:r>
+          </a:p>
+        </p:txBody>
+      </p:sp>
+      <p:sp>
+        <p:nvSpPr>
+          <p:cNvPr id="3" name="Content Placeholder 2">
+            <a:extLst>
+              <a:ext uri="{FF2B5EF4-FFF2-40B4-BE49-F238E27FC236}">
+                <a16:creationId xmlns:a16="http://schemas.microsoft.com/office/drawing/2014/main" id="{E68CEA5C-C237-E581-D014-36BC7A441714}"/>
+              </a:ext>
+            </a:extLst>
+          </p:cNvPr>
+          <p:cNvSpPr>
+            <a:spLocks noGrp="1"/>
+          </p:cNvSpPr>
+          <p:nvPr>
+            <p:ph idx="1"/>
+          </p:nvPr>
+        </p:nvSpPr>
+        <p:spPr>
+          <a:xfrm>
+            <a:off x="119741" y="2334985"/>
+            <a:ext cx="4631873" cy="4318907"/>
+          </a:xfrm>
+        </p:spPr>
+        <p:style>
+          <a:lnRef idx="2">
+            <a:schemeClr val="accent6"/>
+          </a:lnRef>
+          <a:fillRef idx="1">
+            <a:schemeClr val="lt1"/>
+          </a:fillRef>
+          <a:effectRef idx="0">
+            <a:schemeClr val="accent6"/>
+          </a:effectRef>
+          <a:fontRef idx="minor">
+            <a:schemeClr val="dk1"/>
+          </a:fontRef>
+        </p:style>
+        <p:txBody>
+          <a:bodyPr>
+            <a:normAutofit fontScale="47500" lnSpcReduction="20000"/>
+          </a:bodyPr>
+          <a:lstStyle/>
+          <a:p>
+            <a:r>
+              <a:rPr lang="en-US" sz="3300" dirty="0"/>
+              <a:t>SQL Query:</a:t>
+            </a:r>
+          </a:p>
+          <a:p>
+            <a:pPr marL="114300" indent="0">
+              <a:buNone/>
+            </a:pPr>
+            <a:r>
+              <a:rPr lang="en-US" sz="3300" dirty="0"/>
+              <a:t>SELECT </a:t>
+            </a:r>
+            <a:r>
+              <a:rPr lang="en-US" sz="3300" dirty="0" err="1"/>
+              <a:t>u.user_id</a:t>
+            </a:r>
+            <a:r>
+              <a:rPr lang="en-US" sz="3300" dirty="0"/>
+              <a:t>, </a:t>
+            </a:r>
+            <a:r>
+              <a:rPr lang="en-US" sz="3300" dirty="0" err="1"/>
+              <a:t>u.first_name</a:t>
+            </a:r>
+            <a:r>
+              <a:rPr lang="en-US" sz="3300" dirty="0"/>
+              <a:t>, </a:t>
+            </a:r>
+            <a:r>
+              <a:rPr lang="en-US" sz="3300" dirty="0" err="1"/>
+              <a:t>u.last_name</a:t>
+            </a:r>
+            <a:r>
+              <a:rPr lang="en-US" sz="3300" dirty="0"/>
+              <a:t>,</a:t>
+            </a:r>
+          </a:p>
+          <a:p>
+            <a:pPr marL="114300" indent="0">
+              <a:buNone/>
+            </a:pPr>
+            <a:r>
+              <a:rPr lang="en-US" sz="3300" dirty="0"/>
+              <a:t>       COUNT(</a:t>
+            </a:r>
+            <a:r>
+              <a:rPr lang="en-US" sz="3300" dirty="0" err="1"/>
+              <a:t>pay.payment_id</a:t>
+            </a:r>
+            <a:r>
+              <a:rPr lang="en-US" sz="3300" dirty="0"/>
+              <a:t>)   AS </a:t>
+            </a:r>
+            <a:r>
+              <a:rPr lang="en-US" sz="3300" dirty="0" err="1"/>
+              <a:t>total_payments</a:t>
+            </a:r>
+            <a:r>
+              <a:rPr lang="en-US" sz="3300" dirty="0"/>
+              <a:t>,</a:t>
+            </a:r>
+          </a:p>
+          <a:p>
+            <a:pPr marL="114300" indent="0">
+              <a:buNone/>
+            </a:pPr>
+            <a:r>
+              <a:rPr lang="en-US" sz="3300" dirty="0"/>
+              <a:t>       SUM(</a:t>
+            </a:r>
+            <a:r>
+              <a:rPr lang="en-US" sz="3300" dirty="0" err="1"/>
+              <a:t>pay.seller_earning</a:t>
+            </a:r>
+            <a:r>
+              <a:rPr lang="en-US" sz="3300" dirty="0"/>
+              <a:t>) AS </a:t>
+            </a:r>
+            <a:r>
+              <a:rPr lang="en-US" sz="3300" dirty="0" err="1"/>
+              <a:t>total_earned</a:t>
+            </a:r>
+            <a:endParaRPr lang="en-US" sz="3300" dirty="0"/>
+          </a:p>
+          <a:p>
+            <a:pPr marL="114300" indent="0">
+              <a:buNone/>
+            </a:pPr>
+            <a:r>
+              <a:rPr lang="en-US" sz="3300" dirty="0"/>
+              <a:t>FROM Users u</a:t>
+            </a:r>
+          </a:p>
+          <a:p>
+            <a:pPr marL="114300" indent="0">
+              <a:buNone/>
+            </a:pPr>
+            <a:r>
+              <a:rPr lang="en-US" sz="3300" dirty="0"/>
+              <a:t>JOIN Products p ON </a:t>
+            </a:r>
+            <a:r>
+              <a:rPr lang="en-US" sz="3300" dirty="0" err="1"/>
+              <a:t>u.user_id</a:t>
+            </a:r>
+            <a:r>
+              <a:rPr lang="en-US" sz="3300" dirty="0"/>
+              <a:t> = </a:t>
+            </a:r>
+            <a:r>
+              <a:rPr lang="en-US" sz="3300" dirty="0" err="1"/>
+              <a:t>p.seller_id</a:t>
+            </a:r>
+            <a:endParaRPr lang="en-US" sz="3300" dirty="0"/>
+          </a:p>
+          <a:p>
+            <a:pPr marL="114300" indent="0">
+              <a:buNone/>
+            </a:pPr>
+            <a:r>
+              <a:rPr lang="en-US" sz="3300" dirty="0"/>
+              <a:t>JOIN Subscriptions s ON </a:t>
+            </a:r>
+            <a:r>
+              <a:rPr lang="en-US" sz="3300" dirty="0" err="1"/>
+              <a:t>p.product_id</a:t>
+            </a:r>
+            <a:r>
+              <a:rPr lang="en-US" sz="3300" dirty="0"/>
+              <a:t> = </a:t>
+            </a:r>
+            <a:r>
+              <a:rPr lang="en-US" sz="3300" dirty="0" err="1"/>
+              <a:t>s.product_id</a:t>
+            </a:r>
+            <a:endParaRPr lang="en-US" sz="3300" dirty="0"/>
+          </a:p>
+          <a:p>
+            <a:pPr marL="114300" indent="0">
+              <a:buNone/>
+            </a:pPr>
+            <a:r>
+              <a:rPr lang="en-US" sz="3300" dirty="0"/>
+              <a:t>JOIN Payments pay ON </a:t>
+            </a:r>
+            <a:r>
+              <a:rPr lang="en-US" sz="3300" dirty="0" err="1"/>
+              <a:t>s.subscription_id</a:t>
+            </a:r>
+            <a:r>
+              <a:rPr lang="en-US" sz="3300" dirty="0"/>
+              <a:t> = </a:t>
+            </a:r>
+            <a:r>
+              <a:rPr lang="en-US" sz="3300" dirty="0" err="1"/>
+              <a:t>pay.subscription_id</a:t>
+            </a:r>
+            <a:endParaRPr lang="en-US" sz="3300" dirty="0"/>
+          </a:p>
+          <a:p>
+            <a:pPr marL="114300" indent="0">
+              <a:buNone/>
+            </a:pPr>
+            <a:r>
+              <a:rPr lang="en-US" sz="3300" dirty="0"/>
+              <a:t>WHERE </a:t>
+            </a:r>
+            <a:r>
+              <a:rPr lang="en-US" sz="3300" dirty="0" err="1"/>
+              <a:t>u.role</a:t>
+            </a:r>
+            <a:r>
+              <a:rPr lang="en-US" sz="3300" dirty="0"/>
+              <a:t> = 'seller'</a:t>
+            </a:r>
+          </a:p>
+          <a:p>
+            <a:pPr marL="114300" indent="0">
+              <a:buNone/>
+            </a:pPr>
+            <a:r>
+              <a:rPr lang="en-US" sz="3300" dirty="0"/>
+              <a:t>GROUP BY </a:t>
+            </a:r>
+            <a:r>
+              <a:rPr lang="en-US" sz="3300" dirty="0" err="1"/>
+              <a:t>u.user_id</a:t>
+            </a:r>
+            <a:r>
+              <a:rPr lang="en-US" sz="3300" dirty="0"/>
+              <a:t>, </a:t>
+            </a:r>
+            <a:r>
+              <a:rPr lang="en-US" sz="3300" dirty="0" err="1"/>
+              <a:t>u.first_name</a:t>
+            </a:r>
+            <a:r>
+              <a:rPr lang="en-US" sz="3300" dirty="0"/>
+              <a:t>, </a:t>
+            </a:r>
+            <a:r>
+              <a:rPr lang="en-US" sz="3300" dirty="0" err="1"/>
+              <a:t>u.last_name</a:t>
+            </a:r>
+            <a:endParaRPr lang="en-US" sz="3300" dirty="0"/>
+          </a:p>
+          <a:p>
+            <a:pPr marL="114300" indent="0">
+              <a:buNone/>
+            </a:pPr>
+            <a:r>
+              <a:rPr lang="en-US" sz="3300" dirty="0"/>
+              <a:t>HAVING SUM(</a:t>
+            </a:r>
+            <a:r>
+              <a:rPr lang="en-US" sz="3300" dirty="0" err="1"/>
+              <a:t>pay.seller_earning</a:t>
+            </a:r>
+            <a:r>
+              <a:rPr lang="en-US" sz="3300" dirty="0"/>
+              <a:t>) &gt; 50.00;</a:t>
+            </a:r>
+          </a:p>
+          <a:p>
+            <a:pPr marL="114300" indent="0">
+              <a:buNone/>
+            </a:pPr>
+            <a:endParaRPr lang="en-US" dirty="0"/>
+          </a:p>
+        </p:txBody>
+      </p:sp>
+      <p:sp>
+        <p:nvSpPr>
+          <p:cNvPr id="4" name="Rectangle 3">
+            <a:extLst>
+              <a:ext uri="{FF2B5EF4-FFF2-40B4-BE49-F238E27FC236}">
+                <a16:creationId xmlns:a16="http://schemas.microsoft.com/office/drawing/2014/main" id="{F1E2E8DD-69F5-EEEB-D4FB-C5A6C04368E0}"/>
+              </a:ext>
+            </a:extLst>
+          </p:cNvPr>
+          <p:cNvSpPr/>
+          <p:nvPr/>
+        </p:nvSpPr>
+        <p:spPr>
+          <a:xfrm>
+            <a:off x="4955721" y="536285"/>
+            <a:ext cx="7004958" cy="6109444"/>
+          </a:xfrm>
+          <a:prstGeom prst="rect">
+            <a:avLst/>
+          </a:prstGeom>
+        </p:spPr>
+        <p:style>
+          <a:lnRef idx="2">
+            <a:schemeClr val="accent4"/>
+          </a:lnRef>
+          <a:fillRef idx="1">
+            <a:schemeClr val="lt1"/>
+          </a:fillRef>
+          <a:effectRef idx="0">
+            <a:schemeClr val="accent4"/>
+          </a:effectRef>
+          <a:fontRef idx="minor">
+            <a:schemeClr val="dk1"/>
+          </a:fontRef>
+        </p:style>
+        <p:txBody>
+          <a:bodyPr rtlCol="0" anchor="ctr"/>
+          <a:lstStyle/>
+          <a:p>
+            <a:pPr algn="ctr"/>
+            <a:endParaRPr lang="en-US"/>
+          </a:p>
+        </p:txBody>
+      </p:sp>
+      <p:sp>
+        <p:nvSpPr>
+          <p:cNvPr id="5" name="Rectangle 4">
+            <a:extLst>
+              <a:ext uri="{FF2B5EF4-FFF2-40B4-BE49-F238E27FC236}">
+                <a16:creationId xmlns:a16="http://schemas.microsoft.com/office/drawing/2014/main" id="{AEDBD9E1-DE74-B8DC-90A8-7D4F6514218E}"/>
+              </a:ext>
+            </a:extLst>
+          </p:cNvPr>
+          <p:cNvSpPr/>
+          <p:nvPr/>
+        </p:nvSpPr>
+        <p:spPr>
+          <a:xfrm>
+            <a:off x="4955721" y="166953"/>
+            <a:ext cx="3020379" cy="369332"/>
+          </a:xfrm>
+          <a:prstGeom prst="rect">
+            <a:avLst/>
+          </a:prstGeom>
+        </p:spPr>
+        <p:txBody>
+          <a:bodyPr wrap="none">
+            <a:spAutoFit/>
+          </a:bodyPr>
+          <a:lstStyle/>
+          <a:p>
+            <a:r>
+              <a:rPr lang="en-US" dirty="0"/>
+              <a:t>Snapshot of the query output:</a:t>
+            </a:r>
+          </a:p>
+        </p:txBody>
+      </p:sp>
+      <p:sp>
+        <p:nvSpPr>
+          <p:cNvPr id="6" name="TextBox 5">
+            <a:extLst>
+              <a:ext uri="{FF2B5EF4-FFF2-40B4-BE49-F238E27FC236}">
+                <a16:creationId xmlns:a16="http://schemas.microsoft.com/office/drawing/2014/main" id="{A521E8A4-B8B9-461F-280F-81C6C5B69F3D}"/>
+              </a:ext>
+            </a:extLst>
+          </p:cNvPr>
+          <p:cNvSpPr txBox="1"/>
+          <p:nvPr/>
+        </p:nvSpPr>
+        <p:spPr>
+          <a:xfrm>
+            <a:off x="119741" y="759278"/>
+            <a:ext cx="4631873" cy="1492431"/>
+          </a:xfrm>
+          <a:prstGeom prst="rect">
+            <a:avLst/>
+          </a:prstGeom>
+        </p:spPr>
+        <p:style>
+          <a:lnRef idx="2">
+            <a:schemeClr val="accent1"/>
+          </a:lnRef>
+          <a:fillRef idx="1">
+            <a:schemeClr val="lt1"/>
+          </a:fillRef>
+          <a:effectRef idx="0">
+            <a:schemeClr val="accent1"/>
+          </a:effectRef>
+          <a:fontRef idx="minor">
+            <a:schemeClr val="dk1"/>
+          </a:fontRef>
+        </p:style>
+        <p:txBody>
+          <a:bodyPr wrap="square" rtlCol="0">
+            <a:noAutofit/>
+          </a:bodyPr>
+          <a:lstStyle/>
+          <a:p>
+            <a:r>
+              <a:rPr lang="en-US" dirty="0"/>
+              <a:t>Description:</a:t>
+            </a:r>
+          </a:p>
+          <a:p>
+            <a:r>
+              <a:rPr lang="en-US" dirty="0"/>
+              <a:t>Calculates total earnings and payment count per seller to identify high-performing sellers who have collectively earned more than $50 in seller earnings, helping the platform prioritize support and promotional resources.</a:t>
+            </a:r>
+          </a:p>
+          <a:p>
+            <a:endParaRPr lang="en-US" dirty="0"/>
+          </a:p>
+        </p:txBody>
+      </p:sp>
+    </p:spTree>
+    <p:extLst>
+      <p:ext uri="{BB962C8B-B14F-4D97-AF65-F5344CB8AC3E}">
+        <p14:creationId xmlns:p14="http://schemas.microsoft.com/office/powerpoint/2010/main" val="3804378083"/>
+      </p:ext>
+    </p:extLst>
+  </p:cSld>
+  <p:clrMapOvr>
+    <a:masterClrMapping/>
+  </p:clrMapOvr>
+</p:sld>
+</file>
+
+<file path=ppt/slides/slide28.xml><?xml version="1.0" encoding="utf-8"?>
+<p:sld xmlns:a="http://schemas.openxmlformats.org/drawingml/2006/main" xmlns:r="http://schemas.openxmlformats.org/officeDocument/2006/relationships" xmlns:p="http://schemas.openxmlformats.org/presentationml/2006/main">
+  <p:cSld>
+    <p:spTree>
+      <p:nvGrpSpPr>
+        <p:cNvPr id="1" name="">
+          <a:extLst>
+            <a:ext uri="{FF2B5EF4-FFF2-40B4-BE49-F238E27FC236}">
+              <a16:creationId xmlns:a16="http://schemas.microsoft.com/office/drawing/2014/main" id="{8F7DC02F-C685-1758-A8E6-729C6CF380FB}"/>
+            </a:ext>
+          </a:extLst>
+        </p:cNvPr>
+        <p:cNvGrpSpPr/>
+        <p:nvPr/>
+      </p:nvGrpSpPr>
+      <p:grpSpPr>
+        <a:xfrm>
+          <a:off x="0" y="0"/>
+          <a:ext cx="0" cy="0"/>
+          <a:chOff x="0" y="0"/>
+          <a:chExt cx="0" cy="0"/>
+        </a:xfrm>
+      </p:grpSpPr>
+      <p:sp>
+        <p:nvSpPr>
+          <p:cNvPr id="2" name="Title 1">
+            <a:extLst>
+              <a:ext uri="{FF2B5EF4-FFF2-40B4-BE49-F238E27FC236}">
+                <a16:creationId xmlns:a16="http://schemas.microsoft.com/office/drawing/2014/main" id="{A8CFD7D0-2BB3-9243-92DF-72D4290203F7}"/>
+              </a:ext>
+            </a:extLst>
+          </p:cNvPr>
+          <p:cNvSpPr>
+            <a:spLocks noGrp="1"/>
+          </p:cNvSpPr>
+          <p:nvPr>
+            <p:ph type="title"/>
+          </p:nvPr>
+        </p:nvSpPr>
+        <p:spPr>
+          <a:xfrm>
+            <a:off x="176893" y="152854"/>
+            <a:ext cx="4313464" cy="443139"/>
+          </a:xfrm>
+        </p:spPr>
+        <p:txBody>
+          <a:bodyPr>
+            <a:noAutofit/>
+          </a:bodyPr>
+          <a:lstStyle/>
+          <a:p>
+            <a:r>
+              <a:rPr lang="en-US" sz="2400" dirty="0"/>
+              <a:t>QM10.2: AGGREGATION-JOIN-QUERY WITH SUB-QUERY</a:t>
+            </a:r>
+          </a:p>
+        </p:txBody>
+      </p:sp>
+      <p:sp>
+        <p:nvSpPr>
+          <p:cNvPr id="3" name="Content Placeholder 2">
+            <a:extLst>
+              <a:ext uri="{FF2B5EF4-FFF2-40B4-BE49-F238E27FC236}">
+                <a16:creationId xmlns:a16="http://schemas.microsoft.com/office/drawing/2014/main" id="{A97094D1-D2FB-78E5-B9FE-6F58EBAA1701}"/>
+              </a:ext>
+            </a:extLst>
+          </p:cNvPr>
+          <p:cNvSpPr>
+            <a:spLocks noGrp="1"/>
+          </p:cNvSpPr>
+          <p:nvPr>
+            <p:ph idx="1"/>
+          </p:nvPr>
+        </p:nvSpPr>
+        <p:spPr>
+          <a:xfrm>
+            <a:off x="119741" y="2334986"/>
+            <a:ext cx="4631873" cy="4310744"/>
+          </a:xfrm>
+        </p:spPr>
+        <p:style>
+          <a:lnRef idx="2">
+            <a:schemeClr val="accent6"/>
+          </a:lnRef>
+          <a:fillRef idx="1">
+            <a:schemeClr val="lt1"/>
+          </a:fillRef>
+          <a:effectRef idx="0">
+            <a:schemeClr val="accent6"/>
+          </a:effectRef>
+          <a:fontRef idx="minor">
+            <a:schemeClr val="dk1"/>
+          </a:fontRef>
+        </p:style>
+        <p:txBody>
+          <a:bodyPr>
+            <a:normAutofit fontScale="40000" lnSpcReduction="20000"/>
+          </a:bodyPr>
+          <a:lstStyle/>
+          <a:p>
+            <a:r>
+              <a:rPr lang="en-US" dirty="0"/>
+              <a:t>SQL Query:</a:t>
+            </a:r>
+          </a:p>
+          <a:p>
+            <a:pPr marL="114300" indent="0">
+              <a:buNone/>
+            </a:pPr>
+            <a:r>
+              <a:rPr lang="en-US" sz="3100" dirty="0"/>
+              <a:t>SELECT </a:t>
+            </a:r>
+            <a:r>
+              <a:rPr lang="en-US" sz="3100" dirty="0" err="1"/>
+              <a:t>p.product_id</a:t>
+            </a:r>
+            <a:r>
+              <a:rPr lang="en-US" sz="3100" dirty="0"/>
+              <a:t>, </a:t>
+            </a:r>
+            <a:r>
+              <a:rPr lang="en-US" sz="3100" dirty="0" err="1"/>
+              <a:t>p.product_name</a:t>
+            </a:r>
+            <a:r>
+              <a:rPr lang="en-US" sz="3100" dirty="0"/>
+              <a:t>, </a:t>
+            </a:r>
+            <a:r>
+              <a:rPr lang="en-US" sz="3100" dirty="0" err="1"/>
+              <a:t>p.price</a:t>
+            </a:r>
+            <a:r>
+              <a:rPr lang="en-US" sz="3100" dirty="0"/>
+              <a:t>,</a:t>
+            </a:r>
+          </a:p>
+          <a:p>
+            <a:pPr marL="114300" indent="0">
+              <a:buNone/>
+            </a:pPr>
+            <a:r>
+              <a:rPr lang="en-US" sz="3100" dirty="0"/>
+              <a:t>       </a:t>
+            </a:r>
+            <a:r>
+              <a:rPr lang="en-US" sz="3100" dirty="0" err="1"/>
+              <a:t>product_avg.avg_rating</a:t>
+            </a:r>
+            <a:r>
+              <a:rPr lang="en-US" sz="3100" dirty="0"/>
+              <a:t>,</a:t>
+            </a:r>
+          </a:p>
+          <a:p>
+            <a:pPr marL="114300" indent="0">
+              <a:buNone/>
+            </a:pPr>
+            <a:r>
+              <a:rPr lang="en-US" sz="3100" dirty="0"/>
+              <a:t>       </a:t>
+            </a:r>
+            <a:r>
+              <a:rPr lang="en-US" sz="3100" dirty="0" err="1"/>
+              <a:t>product_avg.review_count</a:t>
+            </a:r>
+            <a:endParaRPr lang="en-US" sz="3100" dirty="0"/>
+          </a:p>
+          <a:p>
+            <a:pPr marL="114300" indent="0">
+              <a:buNone/>
+            </a:pPr>
+            <a:r>
+              <a:rPr lang="en-US" sz="3100" dirty="0"/>
+              <a:t>FROM Products p</a:t>
+            </a:r>
+          </a:p>
+          <a:p>
+            <a:pPr marL="114300" indent="0">
+              <a:buNone/>
+            </a:pPr>
+            <a:r>
+              <a:rPr lang="en-US" sz="3100" dirty="0"/>
+              <a:t>JOIN (</a:t>
+            </a:r>
+          </a:p>
+          <a:p>
+            <a:pPr marL="114300" indent="0">
+              <a:buNone/>
+            </a:pPr>
+            <a:r>
+              <a:rPr lang="en-US" sz="3100" dirty="0"/>
+              <a:t>    SELECT </a:t>
+            </a:r>
+            <a:r>
+              <a:rPr lang="en-US" sz="3100" dirty="0" err="1"/>
+              <a:t>product_id</a:t>
+            </a:r>
+            <a:r>
+              <a:rPr lang="en-US" sz="3100" dirty="0"/>
+              <a:t>,</a:t>
+            </a:r>
+          </a:p>
+          <a:p>
+            <a:pPr marL="114300" indent="0">
+              <a:buNone/>
+            </a:pPr>
+            <a:r>
+              <a:rPr lang="en-US" sz="3100" dirty="0"/>
+              <a:t>           ROUND(AVG(CAST(rating AS DECIMAL(5,2))), 2) AS </a:t>
+            </a:r>
+            <a:r>
+              <a:rPr lang="en-US" sz="3100" dirty="0" err="1"/>
+              <a:t>avg_rating</a:t>
+            </a:r>
+            <a:r>
+              <a:rPr lang="en-US" sz="3100" dirty="0"/>
+              <a:t>,</a:t>
+            </a:r>
+          </a:p>
+          <a:p>
+            <a:pPr marL="114300" indent="0">
+              <a:buNone/>
+            </a:pPr>
+            <a:r>
+              <a:rPr lang="en-US" sz="3100" dirty="0"/>
+              <a:t>           COUNT(*) AS </a:t>
+            </a:r>
+            <a:r>
+              <a:rPr lang="en-US" sz="3100" dirty="0" err="1"/>
+              <a:t>review_count</a:t>
+            </a:r>
+            <a:endParaRPr lang="en-US" sz="3100" dirty="0"/>
+          </a:p>
+          <a:p>
+            <a:pPr marL="114300" indent="0">
+              <a:buNone/>
+            </a:pPr>
+            <a:r>
+              <a:rPr lang="en-US" sz="3100" dirty="0"/>
+              <a:t>    FROM Reviews</a:t>
+            </a:r>
+          </a:p>
+          <a:p>
+            <a:pPr marL="114300" indent="0">
+              <a:buNone/>
+            </a:pPr>
+            <a:r>
+              <a:rPr lang="en-US" sz="3100" dirty="0"/>
+              <a:t>    GROUP BY </a:t>
+            </a:r>
+            <a:r>
+              <a:rPr lang="en-US" sz="3100" dirty="0" err="1"/>
+              <a:t>product_id</a:t>
+            </a:r>
+            <a:endParaRPr lang="en-US" sz="3100" dirty="0"/>
+          </a:p>
+          <a:p>
+            <a:pPr marL="114300" indent="0">
+              <a:buNone/>
+            </a:pPr>
+            <a:r>
+              <a:rPr lang="en-US" sz="3100" dirty="0"/>
+              <a:t>) AS </a:t>
+            </a:r>
+            <a:r>
+              <a:rPr lang="en-US" sz="3100" dirty="0" err="1"/>
+              <a:t>product_avg</a:t>
+            </a:r>
+            <a:r>
+              <a:rPr lang="en-US" sz="3100" dirty="0"/>
+              <a:t> ON </a:t>
+            </a:r>
+            <a:r>
+              <a:rPr lang="en-US" sz="3100" dirty="0" err="1"/>
+              <a:t>p.product_id</a:t>
+            </a:r>
+            <a:r>
+              <a:rPr lang="en-US" sz="3100" dirty="0"/>
+              <a:t> = </a:t>
+            </a:r>
+            <a:r>
+              <a:rPr lang="en-US" sz="3100" dirty="0" err="1"/>
+              <a:t>product_avg.product_id</a:t>
+            </a:r>
+            <a:endParaRPr lang="en-US" sz="3100" dirty="0"/>
+          </a:p>
+          <a:p>
+            <a:pPr marL="114300" indent="0">
+              <a:buNone/>
+            </a:pPr>
+            <a:r>
+              <a:rPr lang="en-US" sz="3100" dirty="0"/>
+              <a:t>WHERE </a:t>
+            </a:r>
+            <a:r>
+              <a:rPr lang="en-US" sz="3100" dirty="0" err="1"/>
+              <a:t>product_avg.avg_rating</a:t>
+            </a:r>
+            <a:r>
+              <a:rPr lang="en-US" sz="3100" dirty="0"/>
+              <a:t> &gt; (</a:t>
+            </a:r>
+          </a:p>
+          <a:p>
+            <a:pPr marL="114300" indent="0">
+              <a:buNone/>
+            </a:pPr>
+            <a:r>
+              <a:rPr lang="en-US" sz="3100" dirty="0"/>
+              <a:t>    SELECT AVG(CAST(rating AS DECIMAL(5,2)))</a:t>
+            </a:r>
+          </a:p>
+          <a:p>
+            <a:pPr marL="114300" indent="0">
+              <a:buNone/>
+            </a:pPr>
+            <a:r>
+              <a:rPr lang="en-US" sz="3100" dirty="0"/>
+              <a:t>    FROM Reviews</a:t>
+            </a:r>
+          </a:p>
+          <a:p>
+            <a:pPr marL="114300" indent="0">
+              <a:buNone/>
+            </a:pPr>
+            <a:r>
+              <a:rPr lang="en-US" sz="3100" dirty="0"/>
+              <a:t>);</a:t>
+            </a:r>
+          </a:p>
+        </p:txBody>
+      </p:sp>
+      <p:sp>
+        <p:nvSpPr>
+          <p:cNvPr id="4" name="Rectangle 3">
+            <a:extLst>
+              <a:ext uri="{FF2B5EF4-FFF2-40B4-BE49-F238E27FC236}">
+                <a16:creationId xmlns:a16="http://schemas.microsoft.com/office/drawing/2014/main" id="{37BF453D-F21B-FD87-1258-1B3B522319F5}"/>
+              </a:ext>
+            </a:extLst>
+          </p:cNvPr>
+          <p:cNvSpPr/>
+          <p:nvPr/>
+        </p:nvSpPr>
+        <p:spPr>
+          <a:xfrm>
+            <a:off x="4955721" y="536285"/>
+            <a:ext cx="7004958" cy="6109444"/>
+          </a:xfrm>
+          <a:prstGeom prst="rect">
+            <a:avLst/>
+          </a:prstGeom>
+        </p:spPr>
+        <p:style>
+          <a:lnRef idx="2">
+            <a:schemeClr val="accent4"/>
+          </a:lnRef>
+          <a:fillRef idx="1">
+            <a:schemeClr val="lt1"/>
+          </a:fillRef>
+          <a:effectRef idx="0">
+            <a:schemeClr val="accent4"/>
+          </a:effectRef>
+          <a:fontRef idx="minor">
+            <a:schemeClr val="dk1"/>
+          </a:fontRef>
+        </p:style>
+        <p:txBody>
+          <a:bodyPr rtlCol="0" anchor="ctr"/>
+          <a:lstStyle/>
+          <a:p>
+            <a:pPr algn="ctr"/>
+            <a:endParaRPr lang="en-US"/>
+          </a:p>
+        </p:txBody>
+      </p:sp>
+      <p:sp>
+        <p:nvSpPr>
+          <p:cNvPr id="5" name="Rectangle 4">
+            <a:extLst>
+              <a:ext uri="{FF2B5EF4-FFF2-40B4-BE49-F238E27FC236}">
+                <a16:creationId xmlns:a16="http://schemas.microsoft.com/office/drawing/2014/main" id="{3F42617F-4E6F-5917-19F6-1BBD9E9EFD15}"/>
+              </a:ext>
+            </a:extLst>
+          </p:cNvPr>
+          <p:cNvSpPr/>
+          <p:nvPr/>
+        </p:nvSpPr>
+        <p:spPr>
+          <a:xfrm>
+            <a:off x="4955721" y="166953"/>
+            <a:ext cx="3020379" cy="369332"/>
+          </a:xfrm>
+          <a:prstGeom prst="rect">
+            <a:avLst/>
+          </a:prstGeom>
+        </p:spPr>
+        <p:txBody>
+          <a:bodyPr wrap="none">
+            <a:spAutoFit/>
+          </a:bodyPr>
+          <a:lstStyle/>
+          <a:p>
+            <a:r>
+              <a:rPr lang="en-US" dirty="0"/>
+              <a:t>Snapshot of the query output:</a:t>
+            </a:r>
+          </a:p>
+        </p:txBody>
+      </p:sp>
+      <p:sp>
+        <p:nvSpPr>
+          <p:cNvPr id="6" name="TextBox 5">
+            <a:extLst>
+              <a:ext uri="{FF2B5EF4-FFF2-40B4-BE49-F238E27FC236}">
+                <a16:creationId xmlns:a16="http://schemas.microsoft.com/office/drawing/2014/main" id="{19BE6AD2-F547-45DC-24CE-3A6F77781CE3}"/>
+              </a:ext>
+            </a:extLst>
+          </p:cNvPr>
+          <p:cNvSpPr txBox="1"/>
+          <p:nvPr/>
+        </p:nvSpPr>
+        <p:spPr>
+          <a:xfrm>
+            <a:off x="119741" y="759278"/>
+            <a:ext cx="4631873" cy="1492431"/>
+          </a:xfrm>
+          <a:prstGeom prst="rect">
+            <a:avLst/>
+          </a:prstGeom>
+        </p:spPr>
+        <p:style>
+          <a:lnRef idx="2">
+            <a:schemeClr val="accent1"/>
+          </a:lnRef>
+          <a:fillRef idx="1">
+            <a:schemeClr val="lt1"/>
+          </a:fillRef>
+          <a:effectRef idx="0">
+            <a:schemeClr val="accent1"/>
+          </a:effectRef>
+          <a:fontRef idx="minor">
+            <a:schemeClr val="dk1"/>
+          </a:fontRef>
+        </p:style>
+        <p:txBody>
+          <a:bodyPr wrap="square" rtlCol="0">
+            <a:noAutofit/>
+          </a:bodyPr>
+          <a:lstStyle/>
+          <a:p>
+            <a:r>
+              <a:rPr lang="en-US" dirty="0"/>
+              <a:t>Description:</a:t>
+            </a:r>
+          </a:p>
+          <a:p>
+            <a:r>
+              <a:rPr lang="en-US" dirty="0"/>
+              <a:t>Surfaces products whose average customer rating exceeds the platform-wide average rating, giving the marketplace's featured-products algorithm a list of objectively above-average AI tools.</a:t>
+            </a:r>
+          </a:p>
+          <a:p>
+            <a:endParaRPr lang="en-US" dirty="0"/>
+          </a:p>
+        </p:txBody>
+      </p:sp>
+    </p:spTree>
+    <p:extLst>
+      <p:ext uri="{BB962C8B-B14F-4D97-AF65-F5344CB8AC3E}">
+        <p14:creationId xmlns:p14="http://schemas.microsoft.com/office/powerpoint/2010/main" val="3588793605"/>
+      </p:ext>
+    </p:extLst>
+  </p:cSld>
+  <p:clrMapOvr>
+    <a:masterClrMapping/>
+  </p:clrMapOvr>
+</p:sld>
+</file>
+
+<file path=ppt/slides/slide29.xml><?xml version="1.0" encoding="utf-8"?>
+<p:sld xmlns:a="http://schemas.openxmlformats.org/drawingml/2006/main" xmlns:r="http://schemas.openxmlformats.org/officeDocument/2006/relationships" xmlns:p="http://schemas.openxmlformats.org/presentationml/2006/main">
+  <p:cSld>
+    <p:spTree>
+      <p:nvGrpSpPr>
+        <p:cNvPr id="1" name="">
+          <a:extLst>
+            <a:ext uri="{FF2B5EF4-FFF2-40B4-BE49-F238E27FC236}">
+              <a16:creationId xmlns:a16="http://schemas.microsoft.com/office/drawing/2014/main" id="{47C6DB1A-0B75-DA25-696D-7DE224790616}"/>
+            </a:ext>
+          </a:extLst>
+        </p:cNvPr>
+        <p:cNvGrpSpPr/>
+        <p:nvPr/>
+      </p:nvGrpSpPr>
+      <p:grpSpPr>
+        <a:xfrm>
+          <a:off x="0" y="0"/>
+          <a:ext cx="0" cy="0"/>
+          <a:chOff x="0" y="0"/>
+          <a:chExt cx="0" cy="0"/>
+        </a:xfrm>
+      </p:grpSpPr>
+      <p:sp>
+        <p:nvSpPr>
+          <p:cNvPr id="2" name="Title 1">
+            <a:extLst>
+              <a:ext uri="{FF2B5EF4-FFF2-40B4-BE49-F238E27FC236}">
+                <a16:creationId xmlns:a16="http://schemas.microsoft.com/office/drawing/2014/main" id="{6FD38668-E4AC-C493-CBAB-B36F8CC83297}"/>
+              </a:ext>
+            </a:extLst>
+          </p:cNvPr>
+          <p:cNvSpPr>
+            <a:spLocks noGrp="1"/>
+          </p:cNvSpPr>
+          <p:nvPr>
+            <p:ph type="title"/>
+          </p:nvPr>
+        </p:nvSpPr>
+        <p:spPr>
+          <a:xfrm>
+            <a:off x="176893" y="152854"/>
+            <a:ext cx="4313464" cy="443139"/>
+          </a:xfrm>
+        </p:spPr>
+        <p:txBody>
+          <a:bodyPr>
+            <a:noAutofit/>
+          </a:bodyPr>
+          <a:lstStyle/>
+          <a:p>
+            <a:r>
+              <a:rPr lang="en-US" sz="3600" dirty="0"/>
+              <a:t>QM11: WITH-QUERY</a:t>
+            </a:r>
+          </a:p>
+        </p:txBody>
+      </p:sp>
+      <p:sp>
+        <p:nvSpPr>
+          <p:cNvPr id="3" name="Content Placeholder 2">
+            <a:extLst>
+              <a:ext uri="{FF2B5EF4-FFF2-40B4-BE49-F238E27FC236}">
+                <a16:creationId xmlns:a16="http://schemas.microsoft.com/office/drawing/2014/main" id="{7EA4426B-E123-8617-C6CE-93F73B95D41A}"/>
+              </a:ext>
+            </a:extLst>
+          </p:cNvPr>
+          <p:cNvSpPr>
+            <a:spLocks noGrp="1"/>
+          </p:cNvSpPr>
+          <p:nvPr>
+            <p:ph idx="1"/>
+          </p:nvPr>
+        </p:nvSpPr>
+        <p:spPr>
+          <a:xfrm>
+            <a:off x="119741" y="2334985"/>
+            <a:ext cx="4631873" cy="4318907"/>
+          </a:xfrm>
+        </p:spPr>
+        <p:style>
+          <a:lnRef idx="2">
+            <a:schemeClr val="accent6"/>
+          </a:lnRef>
+          <a:fillRef idx="1">
+            <a:schemeClr val="lt1"/>
+          </a:fillRef>
+          <a:effectRef idx="0">
+            <a:schemeClr val="accent6"/>
+          </a:effectRef>
+          <a:fontRef idx="minor">
+            <a:schemeClr val="dk1"/>
+          </a:fontRef>
+        </p:style>
+        <p:txBody>
+          <a:bodyPr>
+            <a:normAutofit fontScale="92500"/>
+          </a:bodyPr>
+          <a:lstStyle/>
+          <a:p>
+            <a:r>
+              <a:rPr lang="en-US" sz="1200" dirty="0"/>
+              <a:t>SQL Query:</a:t>
+            </a:r>
+          </a:p>
+          <a:p>
+            <a:pPr marL="114300" indent="0">
+              <a:buNone/>
+            </a:pPr>
+            <a:r>
+              <a:rPr lang="en-US" sz="1200" dirty="0"/>
+              <a:t>WITH </a:t>
+            </a:r>
+            <a:r>
+              <a:rPr lang="en-US" sz="1200" dirty="0" err="1"/>
+              <a:t>SellerRevenue</a:t>
+            </a:r>
+            <a:r>
+              <a:rPr lang="en-US" sz="1200" dirty="0"/>
+              <a:t> AS (</a:t>
+            </a:r>
+          </a:p>
+          <a:p>
+            <a:pPr marL="114300" indent="0">
+              <a:buNone/>
+            </a:pPr>
+            <a:r>
+              <a:rPr lang="en-US" sz="1200" dirty="0"/>
+              <a:t>    SELECT </a:t>
+            </a:r>
+            <a:r>
+              <a:rPr lang="en-US" sz="1200" dirty="0" err="1"/>
+              <a:t>u.user_id</a:t>
+            </a:r>
+            <a:r>
+              <a:rPr lang="en-US" sz="1200" dirty="0"/>
+              <a:t>, </a:t>
+            </a:r>
+            <a:r>
+              <a:rPr lang="en-US" sz="1200" dirty="0" err="1"/>
+              <a:t>u.first_name</a:t>
+            </a:r>
+            <a:r>
+              <a:rPr lang="en-US" sz="1200" dirty="0"/>
+              <a:t>, </a:t>
+            </a:r>
+            <a:r>
+              <a:rPr lang="en-US" sz="1200" dirty="0" err="1"/>
+              <a:t>u.last_name</a:t>
+            </a:r>
+            <a:r>
+              <a:rPr lang="en-US" sz="1200" dirty="0"/>
+              <a:t>,</a:t>
+            </a:r>
+          </a:p>
+          <a:p>
+            <a:pPr marL="114300" indent="0">
+              <a:buNone/>
+            </a:pPr>
+            <a:r>
+              <a:rPr lang="en-US" sz="1200" dirty="0"/>
+              <a:t>           SUM(</a:t>
+            </a:r>
+            <a:r>
+              <a:rPr lang="en-US" sz="1200" dirty="0" err="1"/>
+              <a:t>pay.seller_earning</a:t>
+            </a:r>
+            <a:r>
+              <a:rPr lang="en-US" sz="1200" dirty="0"/>
+              <a:t>) AS </a:t>
+            </a:r>
+            <a:r>
+              <a:rPr lang="en-US" sz="1200" dirty="0" err="1"/>
+              <a:t>total_seller_earning</a:t>
+            </a:r>
+            <a:endParaRPr lang="en-US" sz="1200" dirty="0"/>
+          </a:p>
+          <a:p>
+            <a:pPr marL="114300" indent="0">
+              <a:buNone/>
+            </a:pPr>
+            <a:r>
+              <a:rPr lang="en-US" sz="1200" dirty="0"/>
+              <a:t>    FROM Users u</a:t>
+            </a:r>
+          </a:p>
+          <a:p>
+            <a:pPr marL="114300" indent="0">
+              <a:buNone/>
+            </a:pPr>
+            <a:r>
+              <a:rPr lang="en-US" sz="1200" dirty="0"/>
+              <a:t>    JOIN Products p      ON </a:t>
+            </a:r>
+            <a:r>
+              <a:rPr lang="en-US" sz="1200" dirty="0" err="1"/>
+              <a:t>u.user_id</a:t>
+            </a:r>
+            <a:r>
+              <a:rPr lang="en-US" sz="1200" dirty="0"/>
+              <a:t>         = </a:t>
+            </a:r>
+            <a:r>
+              <a:rPr lang="en-US" sz="1200" dirty="0" err="1"/>
+              <a:t>p.seller_id</a:t>
+            </a:r>
+            <a:endParaRPr lang="en-US" sz="1200" dirty="0"/>
+          </a:p>
+          <a:p>
+            <a:pPr marL="114300" indent="0">
+              <a:buNone/>
+            </a:pPr>
+            <a:r>
+              <a:rPr lang="en-US" sz="1200" dirty="0"/>
+              <a:t>    JOIN Subscriptions s ON </a:t>
+            </a:r>
+            <a:r>
+              <a:rPr lang="en-US" sz="1200" dirty="0" err="1"/>
+              <a:t>p.product_id</a:t>
+            </a:r>
+            <a:r>
+              <a:rPr lang="en-US" sz="1200" dirty="0"/>
+              <a:t>      = </a:t>
+            </a:r>
+            <a:r>
+              <a:rPr lang="en-US" sz="1200" dirty="0" err="1"/>
+              <a:t>s.product_id</a:t>
+            </a:r>
+            <a:endParaRPr lang="en-US" sz="1200" dirty="0"/>
+          </a:p>
+          <a:p>
+            <a:pPr marL="114300" indent="0">
+              <a:buNone/>
+            </a:pPr>
+            <a:r>
+              <a:rPr lang="en-US" sz="1200" dirty="0"/>
+              <a:t>    JOIN Payments pay    ON </a:t>
+            </a:r>
+            <a:r>
+              <a:rPr lang="en-US" sz="1200" dirty="0" err="1"/>
+              <a:t>s.subscription_id</a:t>
+            </a:r>
+            <a:r>
+              <a:rPr lang="en-US" sz="1200" dirty="0"/>
+              <a:t> = </a:t>
+            </a:r>
+            <a:r>
+              <a:rPr lang="en-US" sz="1200" dirty="0" err="1"/>
+              <a:t>pay.subscription_id</a:t>
+            </a:r>
+            <a:endParaRPr lang="en-US" sz="1200" dirty="0"/>
+          </a:p>
+          <a:p>
+            <a:pPr marL="114300" indent="0">
+              <a:buNone/>
+            </a:pPr>
+            <a:r>
+              <a:rPr lang="en-US" sz="1200" dirty="0"/>
+              <a:t>    WHERE </a:t>
+            </a:r>
+            <a:r>
+              <a:rPr lang="en-US" sz="1200" dirty="0" err="1"/>
+              <a:t>u.role</a:t>
+            </a:r>
+            <a:r>
+              <a:rPr lang="en-US" sz="1200" dirty="0"/>
+              <a:t> = 'seller'</a:t>
+            </a:r>
+          </a:p>
+          <a:p>
+            <a:pPr marL="114300" indent="0">
+              <a:buNone/>
+            </a:pPr>
+            <a:r>
+              <a:rPr lang="en-US" sz="1200" dirty="0"/>
+              <a:t>    GROUP BY </a:t>
+            </a:r>
+            <a:r>
+              <a:rPr lang="en-US" sz="1200" dirty="0" err="1"/>
+              <a:t>u.user_id</a:t>
+            </a:r>
+            <a:r>
+              <a:rPr lang="en-US" sz="1200" dirty="0"/>
+              <a:t>, </a:t>
+            </a:r>
+            <a:r>
+              <a:rPr lang="en-US" sz="1200" dirty="0" err="1"/>
+              <a:t>u.first_name</a:t>
+            </a:r>
+            <a:r>
+              <a:rPr lang="en-US" sz="1200" dirty="0"/>
+              <a:t>, </a:t>
+            </a:r>
+            <a:r>
+              <a:rPr lang="en-US" sz="1200" dirty="0" err="1"/>
+              <a:t>u.last_name</a:t>
+            </a:r>
+            <a:endParaRPr lang="en-US" sz="1200" dirty="0"/>
+          </a:p>
+          <a:p>
+            <a:pPr marL="114300" indent="0">
+              <a:buNone/>
+            </a:pPr>
+            <a:r>
+              <a:rPr lang="en-US" sz="1200" dirty="0"/>
+              <a:t>)</a:t>
+            </a:r>
+          </a:p>
+          <a:p>
+            <a:pPr marL="114300" indent="0">
+              <a:buNone/>
+            </a:pPr>
+            <a:r>
+              <a:rPr lang="en-US" sz="1200" dirty="0"/>
+              <a:t>SELECT </a:t>
+            </a:r>
+            <a:r>
+              <a:rPr lang="en-US" sz="1200" dirty="0" err="1"/>
+              <a:t>user_id</a:t>
+            </a:r>
+            <a:r>
+              <a:rPr lang="en-US" sz="1200" dirty="0"/>
+              <a:t>, </a:t>
+            </a:r>
+            <a:r>
+              <a:rPr lang="en-US" sz="1200" dirty="0" err="1"/>
+              <a:t>first_name</a:t>
+            </a:r>
+            <a:r>
+              <a:rPr lang="en-US" sz="1200" dirty="0"/>
+              <a:t>, </a:t>
+            </a:r>
+            <a:r>
+              <a:rPr lang="en-US" sz="1200" dirty="0" err="1"/>
+              <a:t>last_name</a:t>
+            </a:r>
+            <a:r>
+              <a:rPr lang="en-US" sz="1200" dirty="0"/>
+              <a:t>,</a:t>
+            </a:r>
+          </a:p>
+          <a:p>
+            <a:pPr marL="114300" indent="0">
+              <a:buNone/>
+            </a:pPr>
+            <a:r>
+              <a:rPr lang="en-US" sz="1200" dirty="0"/>
+              <a:t>       </a:t>
+            </a:r>
+            <a:r>
+              <a:rPr lang="en-US" sz="1200" dirty="0" err="1"/>
+              <a:t>total_seller_earning</a:t>
+            </a:r>
+            <a:r>
+              <a:rPr lang="en-US" sz="1200" dirty="0"/>
+              <a:t>,</a:t>
+            </a:r>
+          </a:p>
+          <a:p>
+            <a:pPr marL="114300" indent="0">
+              <a:buNone/>
+            </a:pPr>
+            <a:r>
+              <a:rPr lang="en-US" sz="1200" dirty="0"/>
+              <a:t>       RANK() OVER (ORDER BY </a:t>
+            </a:r>
+            <a:r>
+              <a:rPr lang="en-US" sz="1200" dirty="0" err="1"/>
+              <a:t>total_seller_earning</a:t>
+            </a:r>
+            <a:r>
+              <a:rPr lang="en-US" sz="1200" dirty="0"/>
+              <a:t> DESC) AS </a:t>
+            </a:r>
+            <a:r>
+              <a:rPr lang="en-US" sz="1200" dirty="0" err="1"/>
+              <a:t>earning_rank</a:t>
+            </a:r>
+            <a:endParaRPr lang="en-US" sz="1200" dirty="0"/>
+          </a:p>
+          <a:p>
+            <a:pPr marL="114300" indent="0">
+              <a:buNone/>
+            </a:pPr>
+            <a:r>
+              <a:rPr lang="en-US" sz="1200" dirty="0"/>
+              <a:t>FROM </a:t>
+            </a:r>
+            <a:r>
+              <a:rPr lang="en-US" sz="1200" dirty="0" err="1"/>
+              <a:t>SellerRevenue</a:t>
+            </a:r>
+            <a:r>
+              <a:rPr lang="en-US" sz="1200" dirty="0"/>
+              <a:t>;</a:t>
+            </a:r>
+          </a:p>
+        </p:txBody>
+      </p:sp>
+      <p:sp>
+        <p:nvSpPr>
+          <p:cNvPr id="4" name="Rectangle 3">
+            <a:extLst>
+              <a:ext uri="{FF2B5EF4-FFF2-40B4-BE49-F238E27FC236}">
+                <a16:creationId xmlns:a16="http://schemas.microsoft.com/office/drawing/2014/main" id="{EDB94179-0FB2-1D1B-65C1-AE81CC4F5E16}"/>
+              </a:ext>
+            </a:extLst>
+          </p:cNvPr>
+          <p:cNvSpPr/>
+          <p:nvPr/>
+        </p:nvSpPr>
+        <p:spPr>
+          <a:xfrm>
+            <a:off x="4955721" y="536285"/>
+            <a:ext cx="7004958" cy="6109444"/>
+          </a:xfrm>
+          <a:prstGeom prst="rect">
+            <a:avLst/>
+          </a:prstGeom>
+        </p:spPr>
+        <p:style>
+          <a:lnRef idx="2">
+            <a:schemeClr val="accent4"/>
+          </a:lnRef>
+          <a:fillRef idx="1">
+            <a:schemeClr val="lt1"/>
+          </a:fillRef>
+          <a:effectRef idx="0">
+            <a:schemeClr val="accent4"/>
+          </a:effectRef>
+          <a:fontRef idx="minor">
+            <a:schemeClr val="dk1"/>
+          </a:fontRef>
+        </p:style>
+        <p:txBody>
+          <a:bodyPr rtlCol="0" anchor="ctr"/>
+          <a:lstStyle/>
+          <a:p>
+            <a:pPr algn="ctr"/>
+            <a:endParaRPr lang="en-US"/>
+          </a:p>
+        </p:txBody>
+      </p:sp>
+      <p:sp>
+        <p:nvSpPr>
+          <p:cNvPr id="5" name="Rectangle 4">
+            <a:extLst>
+              <a:ext uri="{FF2B5EF4-FFF2-40B4-BE49-F238E27FC236}">
+                <a16:creationId xmlns:a16="http://schemas.microsoft.com/office/drawing/2014/main" id="{7A52EDDE-9D16-2267-50D3-BDBDF8E7F6B3}"/>
+              </a:ext>
+            </a:extLst>
+          </p:cNvPr>
+          <p:cNvSpPr/>
+          <p:nvPr/>
+        </p:nvSpPr>
+        <p:spPr>
+          <a:xfrm>
+            <a:off x="4955721" y="166953"/>
+            <a:ext cx="3020379" cy="369332"/>
+          </a:xfrm>
+          <a:prstGeom prst="rect">
+            <a:avLst/>
+          </a:prstGeom>
+        </p:spPr>
+        <p:txBody>
+          <a:bodyPr wrap="none">
+            <a:spAutoFit/>
+          </a:bodyPr>
+          <a:lstStyle/>
+          <a:p>
+            <a:r>
+              <a:rPr lang="en-US" dirty="0"/>
+              <a:t>Snapshot of the query output:</a:t>
+            </a:r>
+          </a:p>
+        </p:txBody>
+      </p:sp>
+      <p:sp>
+        <p:nvSpPr>
+          <p:cNvPr id="6" name="TextBox 5">
+            <a:extLst>
+              <a:ext uri="{FF2B5EF4-FFF2-40B4-BE49-F238E27FC236}">
+                <a16:creationId xmlns:a16="http://schemas.microsoft.com/office/drawing/2014/main" id="{6DE1A069-F508-48B4-AFFF-7BD00404ABBA}"/>
+              </a:ext>
+            </a:extLst>
+          </p:cNvPr>
+          <p:cNvSpPr txBox="1"/>
+          <p:nvPr/>
+        </p:nvSpPr>
+        <p:spPr>
+          <a:xfrm>
+            <a:off x="119741" y="759278"/>
+            <a:ext cx="4631873" cy="1492431"/>
+          </a:xfrm>
+          <a:prstGeom prst="rect">
+            <a:avLst/>
+          </a:prstGeom>
+        </p:spPr>
+        <p:style>
+          <a:lnRef idx="2">
+            <a:schemeClr val="accent1"/>
+          </a:lnRef>
+          <a:fillRef idx="1">
+            <a:schemeClr val="lt1"/>
+          </a:fillRef>
+          <a:effectRef idx="0">
+            <a:schemeClr val="accent1"/>
+          </a:effectRef>
+          <a:fontRef idx="minor">
+            <a:schemeClr val="dk1"/>
+          </a:fontRef>
+        </p:style>
+        <p:txBody>
+          <a:bodyPr wrap="square" rtlCol="0">
+            <a:noAutofit/>
+          </a:bodyPr>
+          <a:lstStyle/>
+          <a:p>
+            <a:r>
+              <a:rPr lang="en-US" dirty="0"/>
+              <a:t>Description:</a:t>
+            </a:r>
+          </a:p>
+          <a:p>
+            <a:r>
+              <a:rPr lang="en-US" dirty="0"/>
+              <a:t>Uses a CTE to rank sellers by total earnings so the platform can identify top contributors for tiered incentive payouts.</a:t>
+            </a:r>
+          </a:p>
+          <a:p>
+            <a:endParaRPr lang="en-US" dirty="0"/>
+          </a:p>
+        </p:txBody>
+      </p:sp>
+    </p:spTree>
+    <p:extLst>
+      <p:ext uri="{BB962C8B-B14F-4D97-AF65-F5344CB8AC3E}">
+        <p14:creationId xmlns:p14="http://schemas.microsoft.com/office/powerpoint/2010/main" val="318327251"/>
+      </p:ext>
+    </p:extLst>
   </p:cSld>
   <p:clrMapOvr>
     <a:masterClrMapping/>
@@ -17909,7 +21531,7 @@
         <p:spPr>
           <a:xfrm>
             <a:off x="176893" y="152854"/>
-            <a:ext cx="4313464" cy="443139"/>
+            <a:ext cx="4455068" cy="443139"/>
           </a:xfrm>
           <a:prstGeom prst="rect">
             <a:avLst/>
@@ -17921,32 +21543,18 @@
         </p:spPr>
         <p:txBody>
           <a:bodyPr spcFirstLastPara="1" wrap="square" lIns="91425" tIns="45700" rIns="91425" bIns="45700" anchor="ctr" anchorCtr="0">
-            <a:normAutofit fontScale="90000"/>
+            <a:noAutofit/>
           </a:bodyPr>
           <a:lstStyle/>
           <a:p>
-            <a:pPr marL="0" lvl="0" indent="0" algn="l" rtl="0">
-              <a:lnSpc>
-                <a:spcPct val="90000"/>
-              </a:lnSpc>
-              <a:spcBef>
-                <a:spcPts val="0"/>
-              </a:spcBef>
-              <a:spcAft>
-                <a:spcPts val="0"/>
-              </a:spcAft>
-              <a:buClr>
-                <a:schemeClr val="dk1"/>
-              </a:buClr>
+            <a:pPr>
               <a:buSzPct val="100000"/>
-              <a:buFont typeface="Calibri"/>
-              <a:buNone/>
-            </a:pPr>
-            <a:r>
-              <a:rPr lang="en-US" dirty="0"/>
-              <a:t>Q#: QD1</a:t>
-            </a:r>
-            <a:endParaRPr dirty="0"/>
+            </a:pPr>
+            <a:r>
+              <a:rPr lang="en-US" sz="4000" dirty="0"/>
+              <a:t>QD1: CREATE TABLE</a:t>
+            </a:r>
+            <a:endParaRPr sz="4800" dirty="0"/>
           </a:p>
         </p:txBody>
       </p:sp>
@@ -18339,7 +21947,7 @@
               <a:buNone/>
             </a:pPr>
             <a:r>
-              <a:rPr lang="en-US" sz="1800">
+              <a:rPr lang="en-US" sz="1800" dirty="0">
                 <a:solidFill>
                   <a:schemeClr val="dk1"/>
                 </a:solidFill>
@@ -18350,7 +21958,7 @@
               </a:rPr>
               <a:t>Description: </a:t>
             </a:r>
-            <a:endParaRPr sz="1800">
+            <a:endParaRPr sz="1800" dirty="0">
               <a:solidFill>
                 <a:schemeClr val="dk1"/>
               </a:solidFill>
@@ -18371,7 +21979,7 @@
               <a:buNone/>
             </a:pPr>
             <a:br>
-              <a:rPr lang="en-US" sz="1800">
+              <a:rPr lang="en-US" sz="1800" dirty="0">
                 <a:solidFill>
                   <a:schemeClr val="dk1"/>
                 </a:solidFill>
@@ -18382,7 +21990,7 @@
               </a:rPr>
             </a:br>
             <a:r>
-              <a:rPr lang="en-US" sz="1800">
+              <a:rPr lang="en-US" sz="1800" dirty="0">
                 <a:solidFill>
                   <a:schemeClr val="dk1"/>
                 </a:solidFill>
@@ -18393,7 +22001,7 @@
               </a:rPr>
               <a:t>Create and select the database</a:t>
             </a:r>
-            <a:endParaRPr/>
+            <a:endParaRPr dirty="0"/>
           </a:p>
         </p:txBody>
       </p:sp>
@@ -18433,6 +22041,219 @@
           </a:ln>
         </p:spPr>
       </p:pic>
+    </p:spTree>
+  </p:cSld>
+  <p:clrMapOvr>
+    <a:masterClrMapping/>
+  </p:clrMapOvr>
+</p:sld>
+</file>
+
+<file path=ppt/slides/slide30.xml><?xml version="1.0" encoding="utf-8"?>
+<p:sld xmlns:a="http://schemas.openxmlformats.org/drawingml/2006/main" xmlns:r="http://schemas.openxmlformats.org/officeDocument/2006/relationships" xmlns:p="http://schemas.openxmlformats.org/presentationml/2006/main">
+  <p:cSld>
+    <p:spTree>
+      <p:nvGrpSpPr>
+        <p:cNvPr id="1" name="Shape 192"/>
+        <p:cNvGrpSpPr/>
+        <p:nvPr/>
+      </p:nvGrpSpPr>
+      <p:grpSpPr>
+        <a:xfrm>
+          <a:off x="0" y="0"/>
+          <a:ext cx="0" cy="0"/>
+          <a:chOff x="0" y="0"/>
+          <a:chExt cx="0" cy="0"/>
+        </a:xfrm>
+      </p:grpSpPr>
+      <p:sp>
+        <p:nvSpPr>
+          <p:cNvPr id="193" name="Google Shape;193;p6"/>
+          <p:cNvSpPr txBox="1">
+            <a:spLocks noGrp="1"/>
+          </p:cNvSpPr>
+          <p:nvPr>
+            <p:ph type="title"/>
+          </p:nvPr>
+        </p:nvSpPr>
+        <p:spPr>
+          <a:xfrm>
+            <a:off x="838200" y="365125"/>
+            <a:ext cx="10515600" cy="1325563"/>
+          </a:xfrm>
+          <a:prstGeom prst="rect">
+            <a:avLst/>
+          </a:prstGeom>
+          <a:noFill/>
+          <a:ln>
+            <a:noFill/>
+          </a:ln>
+        </p:spPr>
+        <p:txBody>
+          <a:bodyPr spcFirstLastPara="1" wrap="square" lIns="91425" tIns="45700" rIns="91425" bIns="45700" anchor="ctr" anchorCtr="0">
+            <a:normAutofit/>
+          </a:bodyPr>
+          <a:lstStyle/>
+          <a:p>
+            <a:pPr marL="0" lvl="0" indent="0" algn="l" rtl="0">
+              <a:lnSpc>
+                <a:spcPct val="90000"/>
+              </a:lnSpc>
+              <a:spcBef>
+                <a:spcPts val="0"/>
+              </a:spcBef>
+              <a:spcAft>
+                <a:spcPts val="0"/>
+              </a:spcAft>
+              <a:buClr>
+                <a:schemeClr val="dk1"/>
+              </a:buClr>
+              <a:buSzPts val="4400"/>
+              <a:buFont typeface="Calibri"/>
+              <a:buNone/>
+            </a:pPr>
+            <a:r>
+              <a:rPr lang="en-US"/>
+              <a:t>Credits and References</a:t>
+            </a:r>
+            <a:endParaRPr/>
+          </a:p>
+        </p:txBody>
+      </p:sp>
+      <p:sp>
+        <p:nvSpPr>
+          <p:cNvPr id="194" name="Google Shape;194;p6"/>
+          <p:cNvSpPr txBox="1">
+            <a:spLocks noGrp="1"/>
+          </p:cNvSpPr>
+          <p:nvPr>
+            <p:ph type="body" idx="1"/>
+          </p:nvPr>
+        </p:nvSpPr>
+        <p:spPr>
+          <a:xfrm>
+            <a:off x="838200" y="1825625"/>
+            <a:ext cx="10515600" cy="4351338"/>
+          </a:xfrm>
+          <a:prstGeom prst="rect">
+            <a:avLst/>
+          </a:prstGeom>
+          <a:noFill/>
+          <a:ln>
+            <a:noFill/>
+          </a:ln>
+        </p:spPr>
+        <p:txBody>
+          <a:bodyPr spcFirstLastPara="1" wrap="square" lIns="91425" tIns="45700" rIns="91425" bIns="45700" anchor="t" anchorCtr="0">
+            <a:normAutofit/>
+          </a:bodyPr>
+          <a:lstStyle/>
+          <a:p>
+            <a:pPr marL="0" lvl="0" indent="0" algn="l" rtl="0">
+              <a:lnSpc>
+                <a:spcPct val="100000"/>
+              </a:lnSpc>
+              <a:spcBef>
+                <a:spcPts val="1200"/>
+              </a:spcBef>
+              <a:spcAft>
+                <a:spcPts val="0"/>
+              </a:spcAft>
+              <a:buClr>
+                <a:schemeClr val="dk1"/>
+              </a:buClr>
+              <a:buSzPts val="1100"/>
+              <a:buNone/>
+            </a:pPr>
+            <a:r>
+              <a:rPr lang="en-US"/>
+              <a:t>- SQL Server 2022 Documentation</a:t>
+            </a:r>
+            <a:endParaRPr/>
+          </a:p>
+          <a:p>
+            <a:pPr marL="0" lvl="0" indent="0" algn="l" rtl="0">
+              <a:lnSpc>
+                <a:spcPct val="100000"/>
+              </a:lnSpc>
+              <a:spcBef>
+                <a:spcPts val="1200"/>
+              </a:spcBef>
+              <a:spcAft>
+                <a:spcPts val="0"/>
+              </a:spcAft>
+              <a:buClr>
+                <a:schemeClr val="dk1"/>
+              </a:buClr>
+              <a:buSzPts val="1100"/>
+              <a:buFont typeface="Arial"/>
+              <a:buNone/>
+            </a:pPr>
+            <a:r>
+              <a:rPr lang="en-US"/>
+              <a:t>https://learn.microsoft.com/en-us/sql/sql-server/</a:t>
+            </a:r>
+            <a:endParaRPr/>
+          </a:p>
+          <a:p>
+            <a:pPr marL="228600" lvl="0" indent="-50800" algn="l" rtl="0">
+              <a:lnSpc>
+                <a:spcPct val="90000"/>
+              </a:lnSpc>
+              <a:spcBef>
+                <a:spcPts val="1200"/>
+              </a:spcBef>
+              <a:spcAft>
+                <a:spcPts val="0"/>
+              </a:spcAft>
+              <a:buClr>
+                <a:schemeClr val="dk1"/>
+              </a:buClr>
+              <a:buSzPts val="2800"/>
+              <a:buNone/>
+            </a:pPr>
+            <a:endParaRPr/>
+          </a:p>
+          <a:p>
+            <a:pPr marL="228600" lvl="0" indent="-50800" algn="l" rtl="0">
+              <a:lnSpc>
+                <a:spcPct val="90000"/>
+              </a:lnSpc>
+              <a:spcBef>
+                <a:spcPts val="0"/>
+              </a:spcBef>
+              <a:spcAft>
+                <a:spcPts val="0"/>
+              </a:spcAft>
+              <a:buClr>
+                <a:schemeClr val="dk1"/>
+              </a:buClr>
+              <a:buSzPts val="2800"/>
+              <a:buNone/>
+            </a:pPr>
+            <a:endParaRPr/>
+          </a:p>
+          <a:p>
+            <a:pPr marL="0" lvl="0" indent="0" algn="l" rtl="0">
+              <a:lnSpc>
+                <a:spcPct val="90000"/>
+              </a:lnSpc>
+              <a:spcBef>
+                <a:spcPts val="0"/>
+              </a:spcBef>
+              <a:spcAft>
+                <a:spcPts val="0"/>
+              </a:spcAft>
+              <a:buClr>
+                <a:schemeClr val="dk1"/>
+              </a:buClr>
+              <a:buSzPts val="2800"/>
+              <a:buNone/>
+            </a:pPr>
+            <a:endParaRPr/>
+          </a:p>
+        </p:txBody>
+      </p:sp>
     </p:spTree>
   </p:cSld>
   <p:clrMapOvr>
@@ -18470,8 +22291,8 @@
         </p:nvSpPr>
         <p:spPr>
           <a:xfrm>
-            <a:off x="176893" y="152854"/>
-            <a:ext cx="4313400" cy="443100"/>
+            <a:off x="176892" y="152854"/>
+            <a:ext cx="4395107" cy="443100"/>
           </a:xfrm>
           <a:prstGeom prst="rect">
             <a:avLst/>
@@ -18483,32 +22304,18 @@
         </p:spPr>
         <p:txBody>
           <a:bodyPr spcFirstLastPara="1" wrap="square" lIns="91425" tIns="45700" rIns="91425" bIns="45700" anchor="ctr" anchorCtr="0">
-            <a:normAutofit fontScale="90000"/>
+            <a:noAutofit/>
           </a:bodyPr>
           <a:lstStyle/>
           <a:p>
-            <a:pPr marL="0" lvl="0" indent="0" algn="l" rtl="0">
-              <a:lnSpc>
-                <a:spcPct val="90000"/>
-              </a:lnSpc>
-              <a:spcBef>
-                <a:spcPts val="0"/>
-              </a:spcBef>
-              <a:spcAft>
-                <a:spcPts val="0"/>
-              </a:spcAft>
-              <a:buClr>
-                <a:schemeClr val="dk1"/>
-              </a:buClr>
+            <a:pPr>
               <a:buSzPct val="100000"/>
-              <a:buFont typeface="Calibri"/>
-              <a:buNone/>
-            </a:pPr>
-            <a:r>
-              <a:rPr lang="en-US" dirty="0"/>
-              <a:t>Q#: QD1</a:t>
-            </a:r>
-            <a:endParaRPr dirty="0"/>
+            </a:pPr>
+            <a:r>
+              <a:rPr lang="en-US" sz="4000" dirty="0"/>
+              <a:t>QD1: CREATE TABLE</a:t>
+            </a:r>
+            <a:endParaRPr sz="4000" dirty="0"/>
           </a:p>
         </p:txBody>
       </p:sp>
@@ -18545,7 +22352,7 @@
         </p:spPr>
         <p:txBody>
           <a:bodyPr spcFirstLastPara="1" wrap="square" lIns="91425" tIns="45700" rIns="91425" bIns="45700" anchor="t" anchorCtr="0">
-            <a:normAutofit fontScale="55000" lnSpcReduction="20000"/>
+            <a:normAutofit fontScale="47500" lnSpcReduction="20000"/>
           </a:bodyPr>
           <a:lstStyle/>
           <a:p>
@@ -19057,7 +22864,7 @@
               <a:buNone/>
             </a:pPr>
             <a:r>
-              <a:rPr lang="en-US" sz="1800">
+              <a:rPr lang="en-US" sz="1800" dirty="0">
                 <a:solidFill>
                   <a:schemeClr val="dk1"/>
                 </a:solidFill>
@@ -19068,7 +22875,7 @@
               </a:rPr>
               <a:t>Description: </a:t>
             </a:r>
-            <a:endParaRPr sz="1800">
+            <a:endParaRPr sz="1800" dirty="0">
               <a:solidFill>
                 <a:schemeClr val="dk1"/>
               </a:solidFill>
@@ -19088,7 +22895,7 @@
               </a:spcAft>
               <a:buNone/>
             </a:pPr>
-            <a:endParaRPr sz="1800">
+            <a:endParaRPr sz="1800" dirty="0">
               <a:solidFill>
                 <a:schemeClr val="dk1"/>
               </a:solidFill>
@@ -19109,7 +22916,7 @@
               <a:buNone/>
             </a:pPr>
             <a:r>
-              <a:rPr lang="en-US" sz="1600">
+              <a:rPr lang="en-US" sz="1600" dirty="0">
                 <a:solidFill>
                   <a:schemeClr val="dk1"/>
                 </a:solidFill>
@@ -19121,7 +22928,7 @@
               <a:t>Create User  for the AI Marketplace Platform.</a:t>
             </a:r>
             <a:br>
-              <a:rPr lang="en-US" sz="1800">
+              <a:rPr lang="en-US" sz="1800" dirty="0">
                 <a:solidFill>
                   <a:schemeClr val="dk1"/>
                 </a:solidFill>
@@ -19131,7 +22938,7 @@
                 <a:sym typeface="Calibri"/>
               </a:rPr>
             </a:br>
-            <a:endParaRPr/>
+            <a:endParaRPr dirty="0"/>
           </a:p>
         </p:txBody>
       </p:sp>
@@ -19225,28 +23032,10 @@
           </a:bodyPr>
           <a:lstStyle/>
           <a:p>
-            <a:pPr marL="0" lvl="0" indent="0" algn="l" rtl="0">
-              <a:lnSpc>
-                <a:spcPct val="90000"/>
-              </a:lnSpc>
-              <a:spcBef>
-                <a:spcPts val="0"/>
-              </a:spcBef>
-              <a:spcAft>
-                <a:spcPts val="0"/>
-              </a:spcAft>
-              <a:buClr>
-                <a:schemeClr val="dk1"/>
-              </a:buClr>
-              <a:buSzPct val="100000"/>
-              <a:buFont typeface="Calibri"/>
-              <a:buNone/>
-            </a:pPr>
             <a:r>
               <a:rPr lang="en-US" dirty="0"/>
-              <a:t>Q#: QD2</a:t>
-            </a:r>
-            <a:endParaRPr dirty="0"/>
+              <a:t>QD2: ALTER TABLE</a:t>
+            </a:r>
           </a:p>
         </p:txBody>
       </p:sp>
@@ -19694,7 +23483,7 @@
         <p:spPr>
           <a:xfrm>
             <a:off x="176893" y="152854"/>
-            <a:ext cx="4313400" cy="443100"/>
+            <a:ext cx="5024694" cy="443100"/>
           </a:xfrm>
           <a:prstGeom prst="rect">
             <a:avLst/>
@@ -19706,32 +23495,14 @@
         </p:spPr>
         <p:txBody>
           <a:bodyPr spcFirstLastPara="1" wrap="square" lIns="91425" tIns="45700" rIns="91425" bIns="45700" anchor="ctr" anchorCtr="0">
-            <a:normAutofit fontScale="90000"/>
+            <a:noAutofit/>
           </a:bodyPr>
           <a:lstStyle/>
           <a:p>
-            <a:pPr marL="0" lvl="0" indent="0" algn="l" rtl="0">
-              <a:lnSpc>
-                <a:spcPct val="90000"/>
-              </a:lnSpc>
-              <a:spcBef>
-                <a:spcPts val="0"/>
-              </a:spcBef>
-              <a:spcAft>
-                <a:spcPts val="0"/>
-              </a:spcAft>
-              <a:buClr>
-                <a:schemeClr val="dk1"/>
-              </a:buClr>
-              <a:buSzPct val="100000"/>
-              <a:buFont typeface="Calibri"/>
-              <a:buNone/>
-            </a:pPr>
-            <a:r>
-              <a:rPr lang="en-US" dirty="0"/>
-              <a:t>Q#: QD3</a:t>
-            </a:r>
-            <a:endParaRPr dirty="0"/>
+            <a:r>
+              <a:rPr lang="en-US" sz="2400" dirty="0"/>
+              <a:t>QD3: ADD "CHECK" CONSTRAINT</a:t>
+            </a:r>
           </a:p>
         </p:txBody>
       </p:sp>
@@ -20083,7 +23854,7 @@
               <a:buNone/>
             </a:pPr>
             <a:r>
-              <a:rPr lang="en-US" sz="1800">
+              <a:rPr lang="en-US" sz="1800" dirty="0">
                 <a:solidFill>
                   <a:schemeClr val="dk1"/>
                 </a:solidFill>
@@ -20094,7 +23865,7 @@
               </a:rPr>
               <a:t>Description: </a:t>
             </a:r>
-            <a:endParaRPr sz="1800">
+            <a:endParaRPr sz="1800" dirty="0">
               <a:solidFill>
                 <a:schemeClr val="dk1"/>
               </a:solidFill>
@@ -20114,7 +23885,7 @@
               </a:spcAft>
               <a:buNone/>
             </a:pPr>
-            <a:endParaRPr sz="1800">
+            <a:endParaRPr sz="1800" dirty="0">
               <a:solidFill>
                 <a:schemeClr val="dk1"/>
               </a:solidFill>
@@ -20135,7 +23906,7 @@
               <a:buNone/>
             </a:pPr>
             <a:r>
-              <a:rPr lang="en-US" sz="1800">
+              <a:rPr lang="en-US" sz="1800" dirty="0">
                 <a:solidFill>
                   <a:schemeClr val="dk1"/>
                 </a:solidFill>
@@ -20146,7 +23917,7 @@
               </a:rPr>
               <a:t>Check constraint by ensuring that a user's role can only be assigned as either 'buyer' or 'seller' </a:t>
             </a:r>
-            <a:endParaRPr sz="1800">
+            <a:endParaRPr sz="1800" dirty="0">
               <a:solidFill>
                 <a:schemeClr val="dk1"/>
               </a:solidFill>
@@ -20166,7 +23937,7 @@
               </a:spcAft>
               <a:buNone/>
             </a:pPr>
-            <a:endParaRPr sz="1800">
+            <a:endParaRPr sz="1800" dirty="0">
               <a:solidFill>
                 <a:schemeClr val="dk1"/>
               </a:solidFill>
@@ -20252,7 +24023,7 @@
         <p:spPr>
           <a:xfrm>
             <a:off x="176893" y="152854"/>
-            <a:ext cx="4313400" cy="443100"/>
+            <a:ext cx="4574732" cy="443100"/>
           </a:xfrm>
           <a:prstGeom prst="rect">
             <a:avLst/>
@@ -20264,32 +24035,14 @@
         </p:spPr>
         <p:txBody>
           <a:bodyPr spcFirstLastPara="1" wrap="square" lIns="91425" tIns="45700" rIns="91425" bIns="45700" anchor="ctr" anchorCtr="0">
-            <a:normAutofit fontScale="90000"/>
+            <a:noAutofit/>
           </a:bodyPr>
           <a:lstStyle/>
           <a:p>
-            <a:pPr marL="0" lvl="0" indent="0" algn="l" rtl="0">
-              <a:lnSpc>
-                <a:spcPct val="90000"/>
-              </a:lnSpc>
-              <a:spcBef>
-                <a:spcPts val="0"/>
-              </a:spcBef>
-              <a:spcAft>
-                <a:spcPts val="0"/>
-              </a:spcAft>
-              <a:buClr>
-                <a:schemeClr val="dk1"/>
-              </a:buClr>
-              <a:buSzPct val="100000"/>
-              <a:buFont typeface="Calibri"/>
-              <a:buNone/>
-            </a:pPr>
-            <a:r>
-              <a:rPr lang="en-US" dirty="0"/>
-              <a:t>Q#: QD4</a:t>
-            </a:r>
-            <a:endParaRPr dirty="0"/>
+            <a:r>
+              <a:rPr lang="en-US" sz="2400" dirty="0"/>
+              <a:t>QD4: ADD FK CONSTRAINT(S) TO THE TABLE</a:t>
+            </a:r>
           </a:p>
         </p:txBody>
       </p:sp>
@@ -20773,7 +24526,7 @@
               <a:buNone/>
             </a:pPr>
             <a:r>
-              <a:rPr lang="en-US" sz="1800">
+              <a:rPr lang="en-US" sz="1800" dirty="0">
                 <a:solidFill>
                   <a:schemeClr val="dk1"/>
                 </a:solidFill>
@@ -20784,7 +24537,7 @@
               </a:rPr>
               <a:t>Description: </a:t>
             </a:r>
-            <a:endParaRPr sz="1800">
+            <a:endParaRPr sz="1800" dirty="0">
               <a:solidFill>
                 <a:schemeClr val="dk1"/>
               </a:solidFill>
@@ -20804,7 +24557,7 @@
               </a:spcAft>
               <a:buNone/>
             </a:pPr>
-            <a:endParaRPr sz="1800">
+            <a:endParaRPr sz="1800" dirty="0">
               <a:solidFill>
                 <a:schemeClr val="dk1"/>
               </a:solidFill>
@@ -20825,7 +24578,7 @@
               <a:buNone/>
             </a:pPr>
             <a:r>
-              <a:rPr lang="en-US" sz="1800">
+              <a:rPr lang="en-US" sz="1800" dirty="0">
                 <a:solidFill>
                   <a:schemeClr val="dk1"/>
                 </a:solidFill>
@@ -20836,7 +24589,7 @@
               </a:rPr>
               <a:t>Adds a foreign key constraint linking each product to a valid seller in the Users table</a:t>
             </a:r>
-            <a:endParaRPr/>
+            <a:endParaRPr dirty="0"/>
           </a:p>
         </p:txBody>
       </p:sp>
@@ -20914,7 +24667,7 @@
         <p:spPr>
           <a:xfrm>
             <a:off x="176893" y="152854"/>
-            <a:ext cx="4313400" cy="443100"/>
+            <a:ext cx="4778828" cy="443100"/>
           </a:xfrm>
           <a:prstGeom prst="rect">
             <a:avLst/>
@@ -20926,32 +24679,14 @@
         </p:spPr>
         <p:txBody>
           <a:bodyPr spcFirstLastPara="1" wrap="square" lIns="91425" tIns="45700" rIns="91425" bIns="45700" anchor="ctr" anchorCtr="0">
-            <a:normAutofit fontScale="90000"/>
+            <a:noAutofit/>
           </a:bodyPr>
           <a:lstStyle/>
           <a:p>
-            <a:pPr marL="0" lvl="0" indent="0" algn="l" rtl="0">
-              <a:lnSpc>
-                <a:spcPct val="90000"/>
-              </a:lnSpc>
-              <a:spcBef>
-                <a:spcPts val="0"/>
-              </a:spcBef>
-              <a:spcAft>
-                <a:spcPts val="0"/>
-              </a:spcAft>
-              <a:buClr>
-                <a:schemeClr val="dk1"/>
-              </a:buClr>
-              <a:buSzPct val="100000"/>
-              <a:buFont typeface="Calibri"/>
-              <a:buNone/>
-            </a:pPr>
-            <a:r>
-              <a:rPr lang="en-US" dirty="0"/>
-              <a:t>Q#: QD5</a:t>
-            </a:r>
-            <a:endParaRPr dirty="0"/>
+            <a:r>
+              <a:rPr lang="en-US" sz="3600" dirty="0"/>
+              <a:t>QD5: Create TRIGGER</a:t>
+            </a:r>
           </a:p>
         </p:txBody>
       </p:sp>
